--- a/WeeklyDeck_Template.pptx
+++ b/WeeklyDeck_Template.pptx
@@ -5,7 +5,7 @@
     <p:sldMasterId id="2147483661" r:id="rId4"/>
   </p:sldMasterIdLst>
   <p:notesMasterIdLst>
-    <p:notesMasterId r:id="rId14"/>
+    <p:notesMasterId r:id="rId15"/>
   </p:notesMasterIdLst>
   <p:sldIdLst>
     <p:sldId id="303" r:id="rId5"/>
@@ -15,8 +15,9 @@
     <p:sldId id="3888" r:id="rId9"/>
     <p:sldId id="3891" r:id="rId10"/>
     <p:sldId id="3893" r:id="rId11"/>
-    <p:sldId id="3887" r:id="rId12"/>
-    <p:sldId id="3892" r:id="rId13"/>
+    <p:sldId id="3894" r:id="rId12"/>
+    <p:sldId id="3887" r:id="rId13"/>
+    <p:sldId id="3892" r:id="rId14"/>
   </p:sldIdLst>
   <p:sldSz cx="12192000" cy="6858000"/>
   <p:notesSz cx="6858000" cy="9144000"/>
@@ -1114,15 +1115,6 @@
     </pc:docChg>
   </pc:docChgLst>
   <pc:docChgLst>
-    <pc:chgData name="Kumar, M Pavan" userId="S::mpavkumar@deloitte.com::c57e25e4-4624-4003-81ff-e96fcf3c5b4e" providerId="AD" clId="Web-{23B060F6-0568-EC90-8D71-974C698F1742}"/>
-    <pc:docChg chg="modSld">
-      <pc:chgData name="Kumar, M Pavan" userId="S::mpavkumar@deloitte.com::c57e25e4-4624-4003-81ff-e96fcf3c5b4e" providerId="AD" clId="Web-{23B060F6-0568-EC90-8D71-974C698F1742}" dt="2025-08-29T10:53:10.133" v="19"/>
-      <pc:docMkLst>
-        <pc:docMk/>
-      </pc:docMkLst>
-    </pc:docChg>
-  </pc:docChgLst>
-  <pc:docChgLst>
     <pc:chgData name="Rawat, Pragati" userId="9b4df913-7eb4-456c-8eee-342fbb4de8cb" providerId="ADAL" clId="{BC1DC6D2-5522-4C94-BF43-15ED7545B0BD}"/>
     <pc:docChg chg="custSel modSld">
       <pc:chgData name="Rawat, Pragati" userId="9b4df913-7eb4-456c-8eee-342fbb4de8cb" providerId="ADAL" clId="{BC1DC6D2-5522-4C94-BF43-15ED7545B0BD}" dt="2025-09-12T14:56:09.873" v="100" actId="20577"/>
@@ -1144,6 +1136,15 @@
           </ac:graphicFrameMkLst>
         </pc:graphicFrameChg>
       </pc:sldChg>
+    </pc:docChg>
+  </pc:docChgLst>
+  <pc:docChgLst>
+    <pc:chgData name="Kumar, M Pavan" userId="S::mpavkumar@deloitte.com::c57e25e4-4624-4003-81ff-e96fcf3c5b4e" providerId="AD" clId="Web-{23B060F6-0568-EC90-8D71-974C698F1742}"/>
+    <pc:docChg chg="modSld">
+      <pc:chgData name="Kumar, M Pavan" userId="S::mpavkumar@deloitte.com::c57e25e4-4624-4003-81ff-e96fcf3c5b4e" providerId="AD" clId="Web-{23B060F6-0568-EC90-8D71-974C698F1742}" dt="2025-08-29T10:53:10.133" v="19"/>
+      <pc:docMkLst>
+        <pc:docMk/>
+      </pc:docMkLst>
     </pc:docChg>
   </pc:docChgLst>
   <pc:docChgLst>
@@ -8140,7 +8141,7 @@
           <a:p>
             <a:fld id="{BDA21943-350D-4AAA-BB44-C822C3A37900}" type="datetimeFigureOut">
               <a:rPr lang="en-US" smtClean="0"/>
-              <a:t>2/2/2026</a:t>
+              <a:t>7/9/2026</a:t>
             </a:fld>
             <a:endParaRPr lang="en-US"/>
           </a:p>
@@ -8482,6 +8483,90 @@
     <p:extLst>
       <p:ext uri="{BB962C8B-B14F-4D97-AF65-F5344CB8AC3E}">
         <p14:creationId xmlns:p14="http://schemas.microsoft.com/office/powerpoint/2010/main" val="2874965288"/>
+      </p:ext>
+    </p:extLst>
+  </p:cSld>
+  <p:clrMapOvr>
+    <a:masterClrMapping/>
+  </p:clrMapOvr>
+</p:notes>
+</file>
+
+<file path=ppt/notesSlides/notesSlide10.xml><?xml version="1.0" encoding="utf-8"?>
+<p:notes xmlns:a="http://schemas.openxmlformats.org/drawingml/2006/main" xmlns:r="http://schemas.openxmlformats.org/officeDocument/2006/relationships" xmlns:p="http://schemas.openxmlformats.org/presentationml/2006/main">
+  <p:cSld>
+    <p:spTree>
+      <p:nvGrpSpPr>
+        <p:cNvPr id="1" name=""/>
+        <p:cNvGrpSpPr/>
+        <p:nvPr/>
+      </p:nvGrpSpPr>
+      <p:grpSpPr>
+        <a:xfrm>
+          <a:off x="0" y="0"/>
+          <a:ext cx="0" cy="0"/>
+          <a:chOff x="0" y="0"/>
+          <a:chExt cx="0" cy="0"/>
+        </a:xfrm>
+      </p:grpSpPr>
+      <p:sp>
+        <p:nvSpPr>
+          <p:cNvPr id="2" name="Slide Image Placeholder 1"/>
+          <p:cNvSpPr>
+            <a:spLocks noGrp="1" noRot="1" noChangeAspect="1"/>
+          </p:cNvSpPr>
+          <p:nvPr>
+            <p:ph type="sldImg"/>
+          </p:nvPr>
+        </p:nvSpPr>
+        <p:spPr/>
+      </p:sp>
+      <p:sp>
+        <p:nvSpPr>
+          <p:cNvPr id="3" name="Notes Placeholder 2"/>
+          <p:cNvSpPr>
+            <a:spLocks noGrp="1"/>
+          </p:cNvSpPr>
+          <p:nvPr>
+            <p:ph type="body" idx="1"/>
+          </p:nvPr>
+        </p:nvSpPr>
+        <p:spPr/>
+        <p:txBody>
+          <a:bodyPr/>
+          <a:lstStyle/>
+          <a:p>
+            <a:endParaRPr lang="en-US"/>
+          </a:p>
+        </p:txBody>
+      </p:sp>
+      <p:sp>
+        <p:nvSpPr>
+          <p:cNvPr id="4" name="Slide Number Placeholder 3"/>
+          <p:cNvSpPr>
+            <a:spLocks noGrp="1"/>
+          </p:cNvSpPr>
+          <p:nvPr>
+            <p:ph type="sldNum" sz="quarter" idx="10"/>
+          </p:nvPr>
+        </p:nvSpPr>
+        <p:spPr/>
+        <p:txBody>
+          <a:bodyPr/>
+          <a:lstStyle/>
+          <a:p>
+            <a:fld id="{5EDD572C-0642-445C-95EA-9BF60C5DC72B}" type="slidenum">
+              <a:rPr lang="en-US" smtClean="0"/>
+              <a:t>10</a:t>
+            </a:fld>
+            <a:endParaRPr lang="en-US"/>
+          </a:p>
+        </p:txBody>
+      </p:sp>
+    </p:spTree>
+    <p:extLst>
+      <p:ext uri="{BB962C8B-B14F-4D97-AF65-F5344CB8AC3E}">
+        <p14:creationId xmlns:p14="http://schemas.microsoft.com/office/powerpoint/2010/main" val="3615855096"/>
       </p:ext>
     </p:extLst>
   </p:cSld>
@@ -9000,7 +9085,13 @@
   <p:cSld>
     <p:spTree>
       <p:nvGrpSpPr>
-        <p:cNvPr id="1" name=""/>
+        <p:cNvPr id="1" name="">
+          <a:extLst>
+            <a:ext uri="{FF2B5EF4-FFF2-40B4-BE49-F238E27FC236}">
+              <a16:creationId xmlns:a16="http://schemas.microsoft.com/office/drawing/2014/main" id="{49DA108B-E3B9-7D98-0315-ADD8F229CEE7}"/>
+            </a:ext>
+          </a:extLst>
+        </p:cNvPr>
         <p:cNvGrpSpPr/>
         <p:nvPr/>
       </p:nvGrpSpPr>
@@ -9014,7 +9105,13 @@
       </p:grpSpPr>
       <p:sp>
         <p:nvSpPr>
-          <p:cNvPr id="2" name="Slide Image Placeholder 1"/>
+          <p:cNvPr id="2" name="Slide Image Placeholder 1">
+            <a:extLst>
+              <a:ext uri="{FF2B5EF4-FFF2-40B4-BE49-F238E27FC236}">
+                <a16:creationId xmlns:a16="http://schemas.microsoft.com/office/drawing/2014/main" id="{6279B2DB-7A48-D686-ADC7-B8510894E7B8}"/>
+              </a:ext>
+            </a:extLst>
+          </p:cNvPr>
           <p:cNvSpPr>
             <a:spLocks noGrp="1" noRot="1" noChangeAspect="1"/>
           </p:cNvSpPr>
@@ -9026,7 +9123,13 @@
       </p:sp>
       <p:sp>
         <p:nvSpPr>
-          <p:cNvPr id="3" name="Notes Placeholder 2"/>
+          <p:cNvPr id="3" name="Notes Placeholder 2">
+            <a:extLst>
+              <a:ext uri="{FF2B5EF4-FFF2-40B4-BE49-F238E27FC236}">
+                <a16:creationId xmlns:a16="http://schemas.microsoft.com/office/drawing/2014/main" id="{92309E52-26B9-2F1E-C713-EE407C0973E0}"/>
+              </a:ext>
+            </a:extLst>
+          </p:cNvPr>
           <p:cNvSpPr>
             <a:spLocks noGrp="1"/>
           </p:cNvSpPr>
@@ -9045,7 +9148,13 @@
       </p:sp>
       <p:sp>
         <p:nvSpPr>
-          <p:cNvPr id="4" name="Slide Number Placeholder 3"/>
+          <p:cNvPr id="4" name="Slide Number Placeholder 3">
+            <a:extLst>
+              <a:ext uri="{FF2B5EF4-FFF2-40B4-BE49-F238E27FC236}">
+                <a16:creationId xmlns:a16="http://schemas.microsoft.com/office/drawing/2014/main" id="{3231470F-A6F0-7D55-30CA-7641072FD0E8}"/>
+              </a:ext>
+            </a:extLst>
+          </p:cNvPr>
           <p:cNvSpPr>
             <a:spLocks noGrp="1"/>
           </p:cNvSpPr>
@@ -9069,7 +9178,7 @@
     </p:spTree>
     <p:extLst>
       <p:ext uri="{BB962C8B-B14F-4D97-AF65-F5344CB8AC3E}">
-        <p14:creationId xmlns:p14="http://schemas.microsoft.com/office/powerpoint/2010/main" val="1647387920"/>
+        <p14:creationId xmlns:p14="http://schemas.microsoft.com/office/powerpoint/2010/main" val="460648490"/>
       </p:ext>
     </p:extLst>
   </p:cSld>
@@ -9153,7 +9262,7 @@
     </p:spTree>
     <p:extLst>
       <p:ext uri="{BB962C8B-B14F-4D97-AF65-F5344CB8AC3E}">
-        <p14:creationId xmlns:p14="http://schemas.microsoft.com/office/powerpoint/2010/main" val="3615855096"/>
+        <p14:creationId xmlns:p14="http://schemas.microsoft.com/office/powerpoint/2010/main" val="1647387920"/>
       </p:ext>
     </p:extLst>
   </p:cSld>
@@ -13820,6 +13929,343 @@
 </p:sld>
 </file>
 
+<file path=ppt/slides/slide10.xml><?xml version="1.0" encoding="utf-8"?>
+<p:sld xmlns:a="http://schemas.openxmlformats.org/drawingml/2006/main" xmlns:r="http://schemas.openxmlformats.org/officeDocument/2006/relationships" xmlns:p="http://schemas.openxmlformats.org/presentationml/2006/main">
+  <p:cSld>
+    <p:spTree>
+      <p:nvGrpSpPr>
+        <p:cNvPr id="1" name=""/>
+        <p:cNvGrpSpPr/>
+        <p:nvPr/>
+      </p:nvGrpSpPr>
+      <p:grpSpPr>
+        <a:xfrm>
+          <a:off x="0" y="0"/>
+          <a:ext cx="0" cy="0"/>
+          <a:chOff x="0" y="0"/>
+          <a:chExt cx="0" cy="0"/>
+        </a:xfrm>
+      </p:grpSpPr>
+      <p:graphicFrame>
+        <p:nvGraphicFramePr>
+          <p:cNvPr id="29" name="Object 28" hidden="1">
+            <a:extLst>
+              <a:ext uri="{FF2B5EF4-FFF2-40B4-BE49-F238E27FC236}">
+                <a16:creationId xmlns:a16="http://schemas.microsoft.com/office/drawing/2014/main" id="{3636E115-5E1B-4F14-AF9E-7710AEBB7D1A}"/>
+              </a:ext>
+            </a:extLst>
+          </p:cNvPr>
+          <p:cNvGraphicFramePr>
+            <a:graphicFrameLocks noChangeAspect="1"/>
+          </p:cNvGraphicFramePr>
+          <p:nvPr>
+            <p:custDataLst>
+              <p:tags r:id="rId1"/>
+            </p:custDataLst>
+          </p:nvPr>
+        </p:nvGraphicFramePr>
+        <p:xfrm>
+          <a:off x="1588" y="1588"/>
+          <a:ext cx="1588" cy="1588"/>
+        </p:xfrm>
+        <a:graphic>
+          <a:graphicData uri="http://schemas.openxmlformats.org/presentationml/2006/ole">
+            <mc:AlternateContent xmlns:mc="http://schemas.openxmlformats.org/markup-compatibility/2006">
+              <mc:Choice xmlns:v="urn:schemas-microsoft-com:vml" Requires="v">
+                <p:oleObj name="think-cell Slide" r:id="rId5" imgW="395" imgH="396" progId="TCLayout.ActiveDocument.1">
+                  <p:embed/>
+                </p:oleObj>
+              </mc:Choice>
+              <mc:Fallback>
+                <p:oleObj name="think-cell Slide" r:id="rId5" imgW="395" imgH="396" progId="TCLayout.ActiveDocument.1">
+                  <p:embed/>
+                  <p:pic>
+                    <p:nvPicPr>
+                      <p:cNvPr id="29" name="Object 28" hidden="1">
+                        <a:extLst>
+                          <a:ext uri="{FF2B5EF4-FFF2-40B4-BE49-F238E27FC236}">
+                            <a16:creationId xmlns:a16="http://schemas.microsoft.com/office/drawing/2014/main" id="{3636E115-5E1B-4F14-AF9E-7710AEBB7D1A}"/>
+                          </a:ext>
+                        </a:extLst>
+                      </p:cNvPr>
+                      <p:cNvPicPr/>
+                      <p:nvPr/>
+                    </p:nvPicPr>
+                    <p:blipFill>
+                      <a:blip r:embed="rId6"/>
+                      <a:stretch>
+                        <a:fillRect/>
+                      </a:stretch>
+                    </p:blipFill>
+                    <p:spPr>
+                      <a:xfrm>
+                        <a:off x="1588" y="1588"/>
+                        <a:ext cx="1588" cy="1588"/>
+                      </a:xfrm>
+                      <a:prstGeom prst="rect">
+                        <a:avLst/>
+                      </a:prstGeom>
+                    </p:spPr>
+                  </p:pic>
+                </p:oleObj>
+              </mc:Fallback>
+            </mc:AlternateContent>
+          </a:graphicData>
+        </a:graphic>
+      </p:graphicFrame>
+      <p:sp>
+        <p:nvSpPr>
+          <p:cNvPr id="28" name="Rectangle 27" hidden="1">
+            <a:extLst>
+              <a:ext uri="{FF2B5EF4-FFF2-40B4-BE49-F238E27FC236}">
+                <a16:creationId xmlns:a16="http://schemas.microsoft.com/office/drawing/2014/main" id="{3803FD3E-B1A5-4B86-827A-87806B3A1A90}"/>
+              </a:ext>
+            </a:extLst>
+          </p:cNvPr>
+          <p:cNvSpPr/>
+          <p:nvPr>
+            <p:custDataLst>
+              <p:tags r:id="rId2"/>
+            </p:custDataLst>
+          </p:nvPr>
+        </p:nvSpPr>
+        <p:spPr>
+          <a:xfrm>
+            <a:off x="0" y="0"/>
+            <a:ext cx="158750" cy="158750"/>
+          </a:xfrm>
+          <a:prstGeom prst="rect">
+            <a:avLst/>
+          </a:prstGeom>
+        </p:spPr>
+        <p:style>
+          <a:lnRef idx="2">
+            <a:schemeClr val="accent1">
+              <a:shade val="50000"/>
+            </a:schemeClr>
+          </a:lnRef>
+          <a:fillRef idx="1">
+            <a:schemeClr val="accent1"/>
+          </a:fillRef>
+          <a:effectRef idx="0">
+            <a:schemeClr val="accent1"/>
+          </a:effectRef>
+          <a:fontRef idx="minor">
+            <a:schemeClr val="lt1"/>
+          </a:fontRef>
+        </p:style>
+        <p:txBody>
+          <a:bodyPr vert="horz" wrap="none" lIns="0" tIns="0" rIns="0" bIns="0" numCol="1" spcCol="0" rtlCol="0" anchor="ctr" anchorCtr="0">
+            <a:noAutofit/>
+          </a:bodyPr>
+          <a:lstStyle/>
+          <a:p>
+            <a:pPr algn="ctr">
+              <a:lnSpc>
+                <a:spcPct val="80000"/>
+              </a:lnSpc>
+              <a:spcBef>
+                <a:spcPct val="0"/>
+              </a:spcBef>
+              <a:spcAft>
+                <a:spcPct val="0"/>
+              </a:spcAft>
+            </a:pPr>
+            <a:endParaRPr lang="en-US" sz="3600">
+              <a:latin typeface="Chronicle Display Black" pitchFamily="50" charset="0"/>
+              <a:sym typeface="Chronicle Display Black" pitchFamily="50" charset="0"/>
+            </a:endParaRPr>
+          </a:p>
+        </p:txBody>
+      </p:sp>
+      <p:graphicFrame>
+        <p:nvGraphicFramePr>
+          <p:cNvPr id="12" name="Chart 11">
+            <a:extLst>
+              <a:ext uri="{FF2B5EF4-FFF2-40B4-BE49-F238E27FC236}">
+                <a16:creationId xmlns:a16="http://schemas.microsoft.com/office/drawing/2014/main" id="{9593DCDB-F8CB-49B3-9AEF-CFC9146AC87D}"/>
+              </a:ext>
+            </a:extLst>
+          </p:cNvPr>
+          <p:cNvGraphicFramePr>
+            <a:graphicFrameLocks/>
+          </p:cNvGraphicFramePr>
+          <p:nvPr>
+            <p:extLst>
+              <p:ext uri="{D42A27DB-BD31-4B8C-83A1-F6EECF244321}">
+                <p14:modId xmlns:p14="http://schemas.microsoft.com/office/powerpoint/2010/main" val="1267032336"/>
+              </p:ext>
+            </p:extLst>
+          </p:nvPr>
+        </p:nvGraphicFramePr>
+        <p:xfrm>
+          <a:off x="3803207" y="3599644"/>
+          <a:ext cx="4585587" cy="2250787"/>
+        </p:xfrm>
+        <a:graphic>
+          <a:graphicData uri="http://schemas.openxmlformats.org/drawingml/2006/chart">
+            <c:chart xmlns:c="http://schemas.openxmlformats.org/drawingml/2006/chart" xmlns:r="http://schemas.openxmlformats.org/officeDocument/2006/relationships" r:id="rId7"/>
+          </a:graphicData>
+        </a:graphic>
+      </p:graphicFrame>
+      <p:graphicFrame>
+        <p:nvGraphicFramePr>
+          <p:cNvPr id="4" name="Chart 3">
+            <a:extLst>
+              <a:ext uri="{FF2B5EF4-FFF2-40B4-BE49-F238E27FC236}">
+                <a16:creationId xmlns:a16="http://schemas.microsoft.com/office/drawing/2014/main" id="{8F73F8B6-D25E-47F2-BFFD-FDD187ABD360}"/>
+              </a:ext>
+            </a:extLst>
+          </p:cNvPr>
+          <p:cNvGraphicFramePr>
+            <a:graphicFrameLocks/>
+          </p:cNvGraphicFramePr>
+          <p:nvPr>
+            <p:extLst>
+              <p:ext uri="{D42A27DB-BD31-4B8C-83A1-F6EECF244321}">
+                <p14:modId xmlns:p14="http://schemas.microsoft.com/office/powerpoint/2010/main" val="4271630676"/>
+              </p:ext>
+            </p:extLst>
+          </p:nvPr>
+        </p:nvGraphicFramePr>
+        <p:xfrm>
+          <a:off x="867956" y="1124561"/>
+          <a:ext cx="4689766" cy="2304439"/>
+        </p:xfrm>
+        <a:graphic>
+          <a:graphicData uri="http://schemas.openxmlformats.org/drawingml/2006/chart">
+            <c:chart xmlns:c="http://schemas.openxmlformats.org/drawingml/2006/chart" xmlns:r="http://schemas.openxmlformats.org/officeDocument/2006/relationships" r:id="rId8"/>
+          </a:graphicData>
+        </a:graphic>
+      </p:graphicFrame>
+      <p:graphicFrame>
+        <p:nvGraphicFramePr>
+          <p:cNvPr id="8" name="Chart 7">
+            <a:extLst>
+              <a:ext uri="{FF2B5EF4-FFF2-40B4-BE49-F238E27FC236}">
+                <a16:creationId xmlns:a16="http://schemas.microsoft.com/office/drawing/2014/main" id="{8E2596A8-71AF-EF69-987B-E337D646CAB8}"/>
+              </a:ext>
+            </a:extLst>
+          </p:cNvPr>
+          <p:cNvGraphicFramePr/>
+          <p:nvPr>
+            <p:extLst>
+              <p:ext uri="{D42A27DB-BD31-4B8C-83A1-F6EECF244321}">
+                <p14:modId xmlns:p14="http://schemas.microsoft.com/office/powerpoint/2010/main" val="695408599"/>
+              </p:ext>
+            </p:extLst>
+          </p:nvPr>
+        </p:nvGraphicFramePr>
+        <p:xfrm>
+          <a:off x="7126575" y="1178212"/>
+          <a:ext cx="3596750" cy="2250787"/>
+        </p:xfrm>
+        <a:graphic>
+          <a:graphicData uri="http://schemas.openxmlformats.org/drawingml/2006/chart">
+            <c:chart xmlns:c="http://schemas.openxmlformats.org/drawingml/2006/chart" xmlns:r="http://schemas.openxmlformats.org/officeDocument/2006/relationships" r:id="rId9"/>
+          </a:graphicData>
+        </a:graphic>
+      </p:graphicFrame>
+      <p:sp>
+        <p:nvSpPr>
+          <p:cNvPr id="3" name="Title 8">
+            <a:extLst>
+              <a:ext uri="{FF2B5EF4-FFF2-40B4-BE49-F238E27FC236}">
+                <a16:creationId xmlns:a16="http://schemas.microsoft.com/office/drawing/2014/main" id="{76C02369-2DE7-DFC3-A69E-5A0A1AE1D969}"/>
+              </a:ext>
+            </a:extLst>
+          </p:cNvPr>
+          <p:cNvSpPr txBox="1">
+            <a:spLocks/>
+          </p:cNvSpPr>
+          <p:nvPr/>
+        </p:nvSpPr>
+        <p:spPr>
+          <a:xfrm>
+            <a:off x="1" y="0"/>
+            <a:ext cx="12200234" cy="464218"/>
+          </a:xfrm>
+          <a:prstGeom prst="rect">
+            <a:avLst/>
+          </a:prstGeom>
+          <a:solidFill>
+            <a:srgbClr val="671E75"/>
+          </a:solidFill>
+        </p:spPr>
+        <p:txBody>
+          <a:bodyPr vert="horz" lIns="0" tIns="45720" rIns="0" bIns="0" rtlCol="0" anchor="ctr" anchorCtr="0">
+            <a:noAutofit/>
+          </a:bodyPr>
+          <a:lstStyle>
+            <a:lvl1pPr algn="l" defTabSz="914400" rtl="0" eaLnBrk="1" latinLnBrk="0" hangingPunct="1">
+              <a:lnSpc>
+                <a:spcPct val="90000"/>
+              </a:lnSpc>
+              <a:spcBef>
+                <a:spcPct val="0"/>
+              </a:spcBef>
+              <a:buNone/>
+              <a:defRPr lang="en-US" sz="3600" kern="1200" spc="-75" dirty="0">
+                <a:solidFill>
+                  <a:schemeClr val="tx1"/>
+                </a:solidFill>
+                <a:latin typeface="+mj-lt"/>
+                <a:ea typeface="+mj-ea"/>
+                <a:cs typeface="+mj-cs"/>
+              </a:defRPr>
+            </a:lvl1pPr>
+          </a:lstStyle>
+          <a:p>
+            <a:pPr algn="ctr"/>
+            <a:r>
+              <a:rPr lang="en-US" sz="2400" b="1" dirty="0">
+                <a:solidFill>
+                  <a:srgbClr val="FFFFFF"/>
+                </a:solidFill>
+                <a:latin typeface="Open Sans"/>
+                <a:ea typeface="Open Sans"/>
+                <a:cs typeface="Open Sans"/>
+              </a:rPr>
+              <a:t>Week Ending </a:t>
+            </a:r>
+            <a:r>
+              <a:rPr lang="en-US" sz="2400" b="1" dirty="0" err="1">
+                <a:solidFill>
+                  <a:srgbClr val="FFFFFF"/>
+                </a:solidFill>
+                <a:latin typeface="Open Sans"/>
+                <a:ea typeface="Open Sans"/>
+                <a:cs typeface="Open Sans"/>
+              </a:rPr>
+              <a:t>shortDate</a:t>
+            </a:r>
+            <a:r>
+              <a:rPr lang="en-US" sz="2400" b="1" dirty="0">
+                <a:solidFill>
+                  <a:srgbClr val="FFFFFF"/>
+                </a:solidFill>
+                <a:latin typeface="Open Sans"/>
+                <a:ea typeface="Open Sans"/>
+                <a:cs typeface="Open Sans"/>
+              </a:rPr>
+              <a:t> - Work Packet Status Report</a:t>
+            </a:r>
+          </a:p>
+        </p:txBody>
+      </p:sp>
+    </p:spTree>
+    <p:extLst>
+      <p:ext uri="{BB962C8B-B14F-4D97-AF65-F5344CB8AC3E}">
+        <p14:creationId xmlns:p14="http://schemas.microsoft.com/office/powerpoint/2010/main" val="2988166648"/>
+      </p:ext>
+    </p:extLst>
+  </p:cSld>
+  <p:clrMapOvr>
+    <a:masterClrMapping/>
+  </p:clrMapOvr>
+</p:sld>
+</file>
+
 <file path=ppt/slides/slide2.xml><?xml version="1.0" encoding="utf-8"?>
 <p:sld xmlns:a="http://schemas.openxmlformats.org/drawingml/2006/main" xmlns:r="http://schemas.openxmlformats.org/officeDocument/2006/relationships" xmlns:p="http://schemas.openxmlformats.org/presentationml/2006/main">
   <p:cSld>
@@ -25133,6 +25579,1400 @@
 </file>
 
 <file path=ppt/slides/slide8.xml><?xml version="1.0" encoding="utf-8"?>
+<p:sld xmlns:a="http://schemas.openxmlformats.org/drawingml/2006/main" xmlns:r="http://schemas.openxmlformats.org/officeDocument/2006/relationships" xmlns:p="http://schemas.openxmlformats.org/presentationml/2006/main">
+  <p:cSld>
+    <p:spTree>
+      <p:nvGrpSpPr>
+        <p:cNvPr id="1" name="">
+          <a:extLst>
+            <a:ext uri="{FF2B5EF4-FFF2-40B4-BE49-F238E27FC236}">
+              <a16:creationId xmlns:a16="http://schemas.microsoft.com/office/drawing/2014/main" id="{D92298D1-14FB-A570-8559-7FB95C2D085F}"/>
+            </a:ext>
+          </a:extLst>
+        </p:cNvPr>
+        <p:cNvGrpSpPr/>
+        <p:nvPr/>
+      </p:nvGrpSpPr>
+      <p:grpSpPr>
+        <a:xfrm>
+          <a:off x="0" y="0"/>
+          <a:ext cx="0" cy="0"/>
+          <a:chOff x="0" y="0"/>
+          <a:chExt cx="0" cy="0"/>
+        </a:xfrm>
+      </p:grpSpPr>
+      <p:graphicFrame>
+        <p:nvGraphicFramePr>
+          <p:cNvPr id="29" name="Object 28" hidden="1">
+            <a:extLst>
+              <a:ext uri="{FF2B5EF4-FFF2-40B4-BE49-F238E27FC236}">
+                <a16:creationId xmlns:a16="http://schemas.microsoft.com/office/drawing/2014/main" id="{C2E5460D-9663-F1F2-43F5-AEE9C7EDE3D8}"/>
+              </a:ext>
+            </a:extLst>
+          </p:cNvPr>
+          <p:cNvGraphicFramePr>
+            <a:graphicFrameLocks noChangeAspect="1"/>
+          </p:cNvGraphicFramePr>
+          <p:nvPr>
+            <p:custDataLst>
+              <p:tags r:id="rId1"/>
+            </p:custDataLst>
+          </p:nvPr>
+        </p:nvGraphicFramePr>
+        <p:xfrm>
+          <a:off x="1588" y="1588"/>
+          <a:ext cx="1588" cy="1588"/>
+        </p:xfrm>
+        <a:graphic>
+          <a:graphicData uri="http://schemas.openxmlformats.org/presentationml/2006/ole">
+            <mc:AlternateContent xmlns:mc="http://schemas.openxmlformats.org/markup-compatibility/2006">
+              <mc:Choice xmlns:v="urn:schemas-microsoft-com:vml" Requires="v">
+                <p:oleObj name="think-cell Slide" r:id="rId5" imgW="395" imgH="396" progId="TCLayout.ActiveDocument.1">
+                  <p:embed/>
+                </p:oleObj>
+              </mc:Choice>
+              <mc:Fallback>
+                <p:oleObj name="think-cell Slide" r:id="rId5" imgW="395" imgH="396" progId="TCLayout.ActiveDocument.1">
+                  <p:embed/>
+                  <p:pic>
+                    <p:nvPicPr>
+                      <p:cNvPr id="29" name="Object 28" hidden="1">
+                        <a:extLst>
+                          <a:ext uri="{FF2B5EF4-FFF2-40B4-BE49-F238E27FC236}">
+                            <a16:creationId xmlns:a16="http://schemas.microsoft.com/office/drawing/2014/main" id="{3636E115-5E1B-4F14-AF9E-7710AEBB7D1A}"/>
+                          </a:ext>
+                        </a:extLst>
+                      </p:cNvPr>
+                      <p:cNvPicPr/>
+                      <p:nvPr/>
+                    </p:nvPicPr>
+                    <p:blipFill>
+                      <a:blip r:embed="rId6"/>
+                      <a:stretch>
+                        <a:fillRect/>
+                      </a:stretch>
+                    </p:blipFill>
+                    <p:spPr>
+                      <a:xfrm>
+                        <a:off x="1588" y="1588"/>
+                        <a:ext cx="1588" cy="1588"/>
+                      </a:xfrm>
+                      <a:prstGeom prst="rect">
+                        <a:avLst/>
+                      </a:prstGeom>
+                    </p:spPr>
+                  </p:pic>
+                </p:oleObj>
+              </mc:Fallback>
+            </mc:AlternateContent>
+          </a:graphicData>
+        </a:graphic>
+      </p:graphicFrame>
+      <p:sp>
+        <p:nvSpPr>
+          <p:cNvPr id="28" name="Rectangle 27" hidden="1">
+            <a:extLst>
+              <a:ext uri="{FF2B5EF4-FFF2-40B4-BE49-F238E27FC236}">
+                <a16:creationId xmlns:a16="http://schemas.microsoft.com/office/drawing/2014/main" id="{1616D60E-E9FD-A918-A729-95DA3A64481F}"/>
+              </a:ext>
+            </a:extLst>
+          </p:cNvPr>
+          <p:cNvSpPr/>
+          <p:nvPr>
+            <p:custDataLst>
+              <p:tags r:id="rId2"/>
+            </p:custDataLst>
+          </p:nvPr>
+        </p:nvSpPr>
+        <p:spPr>
+          <a:xfrm>
+            <a:off x="0" y="0"/>
+            <a:ext cx="158750" cy="158750"/>
+          </a:xfrm>
+          <a:prstGeom prst="rect">
+            <a:avLst/>
+          </a:prstGeom>
+        </p:spPr>
+        <p:style>
+          <a:lnRef idx="2">
+            <a:schemeClr val="accent1">
+              <a:shade val="50000"/>
+            </a:schemeClr>
+          </a:lnRef>
+          <a:fillRef idx="1">
+            <a:schemeClr val="accent1"/>
+          </a:fillRef>
+          <a:effectRef idx="0">
+            <a:schemeClr val="accent1"/>
+          </a:effectRef>
+          <a:fontRef idx="minor">
+            <a:schemeClr val="lt1"/>
+          </a:fontRef>
+        </p:style>
+        <p:txBody>
+          <a:bodyPr vert="horz" wrap="none" lIns="0" tIns="0" rIns="0" bIns="0" numCol="1" spcCol="0" rtlCol="0" anchor="ctr" anchorCtr="0">
+            <a:noAutofit/>
+          </a:bodyPr>
+          <a:lstStyle/>
+          <a:p>
+            <a:pPr algn="ctr">
+              <a:lnSpc>
+                <a:spcPct val="80000"/>
+              </a:lnSpc>
+              <a:spcBef>
+                <a:spcPct val="0"/>
+              </a:spcBef>
+              <a:spcAft>
+                <a:spcPct val="0"/>
+              </a:spcAft>
+            </a:pPr>
+            <a:endParaRPr lang="en-US" sz="3600">
+              <a:latin typeface="Chronicle Display Black" pitchFamily="50" charset="0"/>
+              <a:sym typeface="Chronicle Display Black" pitchFamily="50" charset="0"/>
+            </a:endParaRPr>
+          </a:p>
+        </p:txBody>
+      </p:sp>
+      <p:graphicFrame>
+        <p:nvGraphicFramePr>
+          <p:cNvPr id="67" name="Table 66">
+            <a:extLst>
+              <a:ext uri="{FF2B5EF4-FFF2-40B4-BE49-F238E27FC236}">
+                <a16:creationId xmlns:a16="http://schemas.microsoft.com/office/drawing/2014/main" id="{3D6A2EEB-91E8-C714-D559-28B57AC8D0E6}"/>
+              </a:ext>
+            </a:extLst>
+          </p:cNvPr>
+          <p:cNvGraphicFramePr>
+            <a:graphicFrameLocks noGrp="1"/>
+          </p:cNvGraphicFramePr>
+          <p:nvPr>
+            <p:extLst>
+              <p:ext uri="{D42A27DB-BD31-4B8C-83A1-F6EECF244321}">
+                <p14:modId xmlns:p14="http://schemas.microsoft.com/office/powerpoint/2010/main" val="3563895640"/>
+              </p:ext>
+            </p:extLst>
+          </p:nvPr>
+        </p:nvGraphicFramePr>
+        <p:xfrm>
+          <a:off x="0" y="445695"/>
+          <a:ext cx="12198096" cy="9040051"/>
+        </p:xfrm>
+        <a:graphic>
+          <a:graphicData uri="http://schemas.openxmlformats.org/drawingml/2006/table">
+            <a:tbl>
+              <a:tblPr firstRow="1" bandRow="1">
+                <a:tableStyleId>{5940675A-B579-460E-94D1-54222C63F5DA}</a:tableStyleId>
+              </a:tblPr>
+              <a:tblGrid>
+                <a:gridCol w="1092017">
+                  <a:extLst>
+                    <a:ext uri="{9D8B030D-6E8A-4147-A177-3AD203B41FA5}">
+                      <a16:colId xmlns:a16="http://schemas.microsoft.com/office/drawing/2014/main" val="4130080455"/>
+                    </a:ext>
+                  </a:extLst>
+                </a:gridCol>
+                <a:gridCol w="1078861">
+                  <a:extLst>
+                    <a:ext uri="{9D8B030D-6E8A-4147-A177-3AD203B41FA5}">
+                      <a16:colId xmlns:a16="http://schemas.microsoft.com/office/drawing/2014/main" val="3842842890"/>
+                    </a:ext>
+                  </a:extLst>
+                </a:gridCol>
+                <a:gridCol w="4915722">
+                  <a:extLst>
+                    <a:ext uri="{9D8B030D-6E8A-4147-A177-3AD203B41FA5}">
+                      <a16:colId xmlns:a16="http://schemas.microsoft.com/office/drawing/2014/main" val="20002"/>
+                    </a:ext>
+                  </a:extLst>
+                </a:gridCol>
+                <a:gridCol w="5111496">
+                  <a:extLst>
+                    <a:ext uri="{9D8B030D-6E8A-4147-A177-3AD203B41FA5}">
+                      <a16:colId xmlns:a16="http://schemas.microsoft.com/office/drawing/2014/main" val="2455460313"/>
+                    </a:ext>
+                  </a:extLst>
+                </a:gridCol>
+              </a:tblGrid>
+              <a:tr h="588778">
+                <a:tc>
+                  <a:txBody>
+                    <a:bodyPr/>
+                    <a:lstStyle/>
+                    <a:p>
+                      <a:pPr algn="ctr"/>
+                      <a:r>
+                        <a:rPr lang="en-US" sz="1200" b="1" kern="1200">
+                          <a:solidFill>
+                            <a:schemeClr val="tx1"/>
+                          </a:solidFill>
+                          <a:latin typeface="Open Sans"/>
+                          <a:ea typeface="Open Sans"/>
+                          <a:cs typeface="Open Sans"/>
+                        </a:rPr>
+                        <a:t>Item / Application</a:t>
+                      </a:r>
+                      <a:endParaRPr lang="en-US" sz="1200"/>
+                    </a:p>
+                  </a:txBody>
+                  <a:tcPr marT="25807" marB="25807" anchor="ctr">
+                    <a:lnL w="12700" cap="flat" cmpd="sng" algn="ctr">
+                      <a:solidFill>
+                        <a:schemeClr val="tx1">
+                          <a:lumMod val="65000"/>
+                        </a:schemeClr>
+                      </a:solidFill>
+                      <a:prstDash val="solid"/>
+                      <a:round/>
+                      <a:headEnd type="none" w="med" len="med"/>
+                      <a:tailEnd type="none" w="med" len="med"/>
+                    </a:lnL>
+                    <a:lnR w="12700" cap="flat" cmpd="sng" algn="ctr">
+                      <a:solidFill>
+                        <a:schemeClr val="tx1">
+                          <a:lumMod val="65000"/>
+                        </a:schemeClr>
+                      </a:solidFill>
+                      <a:prstDash val="solid"/>
+                      <a:round/>
+                      <a:headEnd type="none" w="med" len="med"/>
+                      <a:tailEnd type="none" w="med" len="med"/>
+                    </a:lnR>
+                    <a:lnT w="12700" cap="flat" cmpd="sng" algn="ctr">
+                      <a:solidFill>
+                        <a:schemeClr val="tx1">
+                          <a:lumMod val="65000"/>
+                        </a:schemeClr>
+                      </a:solidFill>
+                      <a:prstDash val="solid"/>
+                      <a:round/>
+                      <a:headEnd type="none" w="med" len="med"/>
+                      <a:tailEnd type="none" w="med" len="med"/>
+                    </a:lnT>
+                    <a:lnB w="12700" cap="flat" cmpd="sng" algn="ctr">
+                      <a:solidFill>
+                        <a:schemeClr val="tx1">
+                          <a:lumMod val="65000"/>
+                        </a:schemeClr>
+                      </a:solidFill>
+                      <a:prstDash val="solid"/>
+                      <a:round/>
+                      <a:headEnd type="none" w="med" len="med"/>
+                      <a:tailEnd type="none" w="med" len="med"/>
+                    </a:lnB>
+                    <a:lnTlToBr w="12700" cmpd="sng">
+                      <a:noFill/>
+                      <a:prstDash val="solid"/>
+                    </a:lnTlToBr>
+                    <a:lnBlToTr w="12700" cmpd="sng">
+                      <a:noFill/>
+                      <a:prstDash val="solid"/>
+                    </a:lnBlToTr>
+                    <a:solidFill>
+                      <a:srgbClr val="671E75"/>
+                    </a:solidFill>
+                  </a:tcPr>
+                </a:tc>
+                <a:tc>
+                  <a:txBody>
+                    <a:bodyPr/>
+                    <a:lstStyle/>
+                    <a:p>
+                      <a:pPr algn="ctr"/>
+                      <a:r>
+                        <a:rPr lang="en-US" sz="1200" b="1" kern="1200">
+                          <a:solidFill>
+                            <a:schemeClr val="tx1"/>
+                          </a:solidFill>
+                          <a:latin typeface="Open Sans"/>
+                          <a:ea typeface="Open Sans"/>
+                          <a:cs typeface="Open Sans"/>
+                        </a:rPr>
+                        <a:t>WP Pipeline Status</a:t>
+                      </a:r>
+                      <a:endParaRPr lang="en-US" sz="1200"/>
+                    </a:p>
+                  </a:txBody>
+                  <a:tcPr marT="25807" marB="25807" anchor="ctr">
+                    <a:lnL w="12700" cap="flat" cmpd="sng" algn="ctr">
+                      <a:solidFill>
+                        <a:schemeClr val="tx1">
+                          <a:lumMod val="65000"/>
+                        </a:schemeClr>
+                      </a:solidFill>
+                      <a:prstDash val="solid"/>
+                      <a:round/>
+                      <a:headEnd type="none" w="med" len="med"/>
+                      <a:tailEnd type="none" w="med" len="med"/>
+                    </a:lnL>
+                    <a:lnR w="12700" cap="flat" cmpd="sng" algn="ctr">
+                      <a:solidFill>
+                        <a:schemeClr val="tx1">
+                          <a:lumMod val="65000"/>
+                        </a:schemeClr>
+                      </a:solidFill>
+                      <a:prstDash val="solid"/>
+                      <a:round/>
+                      <a:headEnd type="none" w="med" len="med"/>
+                      <a:tailEnd type="none" w="med" len="med"/>
+                    </a:lnR>
+                    <a:lnT w="12700" cap="flat" cmpd="sng" algn="ctr">
+                      <a:solidFill>
+                        <a:schemeClr val="tx1">
+                          <a:lumMod val="65000"/>
+                        </a:schemeClr>
+                      </a:solidFill>
+                      <a:prstDash val="solid"/>
+                      <a:round/>
+                      <a:headEnd type="none" w="med" len="med"/>
+                      <a:tailEnd type="none" w="med" len="med"/>
+                    </a:lnT>
+                    <a:lnB w="12700" cap="flat" cmpd="sng" algn="ctr">
+                      <a:solidFill>
+                        <a:schemeClr val="tx1">
+                          <a:lumMod val="65000"/>
+                        </a:schemeClr>
+                      </a:solidFill>
+                      <a:prstDash val="solid"/>
+                      <a:round/>
+                      <a:headEnd type="none" w="med" len="med"/>
+                      <a:tailEnd type="none" w="med" len="med"/>
+                    </a:lnB>
+                    <a:lnTlToBr w="12700" cmpd="sng">
+                      <a:noFill/>
+                      <a:prstDash val="solid"/>
+                    </a:lnTlToBr>
+                    <a:lnBlToTr w="12700" cmpd="sng">
+                      <a:noFill/>
+                      <a:prstDash val="solid"/>
+                    </a:lnBlToTr>
+                    <a:solidFill>
+                      <a:srgbClr val="671E75"/>
+                    </a:solidFill>
+                  </a:tcPr>
+                </a:tc>
+                <a:tc>
+                  <a:txBody>
+                    <a:bodyPr/>
+                    <a:lstStyle/>
+                    <a:p>
+                      <a:pPr algn="ctr"/>
+                      <a:r>
+                        <a:rPr lang="en-US" sz="1200" b="1" kern="1200">
+                          <a:solidFill>
+                            <a:schemeClr val="tx1"/>
+                          </a:solidFill>
+                          <a:latin typeface="Open Sans"/>
+                          <a:ea typeface="Open Sans"/>
+                          <a:cs typeface="Open Sans"/>
+                        </a:rPr>
+                        <a:t>Overall Status</a:t>
+                      </a:r>
+                      <a:endParaRPr lang="en-US" sz="1200"/>
+                    </a:p>
+                  </a:txBody>
+                  <a:tcPr marT="25807" marB="25807" anchor="ctr">
+                    <a:lnL w="12700" cap="flat" cmpd="sng" algn="ctr">
+                      <a:solidFill>
+                        <a:schemeClr val="tx1">
+                          <a:lumMod val="65000"/>
+                        </a:schemeClr>
+                      </a:solidFill>
+                      <a:prstDash val="solid"/>
+                      <a:round/>
+                      <a:headEnd type="none" w="med" len="med"/>
+                      <a:tailEnd type="none" w="med" len="med"/>
+                    </a:lnL>
+                    <a:lnR w="12700" cap="flat" cmpd="sng" algn="ctr">
+                      <a:solidFill>
+                        <a:schemeClr val="tx1">
+                          <a:lumMod val="65000"/>
+                        </a:schemeClr>
+                      </a:solidFill>
+                      <a:prstDash val="solid"/>
+                      <a:round/>
+                      <a:headEnd type="none" w="med" len="med"/>
+                      <a:tailEnd type="none" w="med" len="med"/>
+                    </a:lnR>
+                    <a:lnT w="12700" cap="flat" cmpd="sng" algn="ctr">
+                      <a:solidFill>
+                        <a:schemeClr val="tx1">
+                          <a:lumMod val="65000"/>
+                        </a:schemeClr>
+                      </a:solidFill>
+                      <a:prstDash val="solid"/>
+                      <a:round/>
+                      <a:headEnd type="none" w="med" len="med"/>
+                      <a:tailEnd type="none" w="med" len="med"/>
+                    </a:lnT>
+                    <a:lnB w="12700" cap="flat" cmpd="sng" algn="ctr">
+                      <a:solidFill>
+                        <a:schemeClr val="tx1">
+                          <a:lumMod val="65000"/>
+                        </a:schemeClr>
+                      </a:solidFill>
+                      <a:prstDash val="solid"/>
+                      <a:round/>
+                      <a:headEnd type="none" w="med" len="med"/>
+                      <a:tailEnd type="none" w="med" len="med"/>
+                    </a:lnB>
+                    <a:lnTlToBr w="12700" cmpd="sng">
+                      <a:noFill/>
+                      <a:prstDash val="solid"/>
+                    </a:lnTlToBr>
+                    <a:lnBlToTr w="12700" cmpd="sng">
+                      <a:noFill/>
+                      <a:prstDash val="solid"/>
+                    </a:lnBlToTr>
+                    <a:solidFill>
+                      <a:srgbClr val="671E75"/>
+                    </a:solidFill>
+                  </a:tcPr>
+                </a:tc>
+                <a:tc>
+                  <a:txBody>
+                    <a:bodyPr/>
+                    <a:lstStyle/>
+                    <a:p>
+                      <a:pPr algn="ctr"/>
+                      <a:r>
+                        <a:rPr lang="en-US" sz="1200" b="1" kern="1200">
+                          <a:solidFill>
+                            <a:schemeClr val="tx1"/>
+                          </a:solidFill>
+                          <a:latin typeface="Open Sans"/>
+                          <a:ea typeface="Open Sans"/>
+                          <a:cs typeface="Open Sans"/>
+                        </a:rPr>
+                        <a:t>Outstanding Items / Upcoming Activities</a:t>
+                      </a:r>
+                      <a:endParaRPr lang="en-US" sz="1200"/>
+                    </a:p>
+                  </a:txBody>
+                  <a:tcPr marT="25807" marB="25807" anchor="ctr">
+                    <a:lnL w="12700" cap="flat" cmpd="sng" algn="ctr">
+                      <a:solidFill>
+                        <a:schemeClr val="tx1">
+                          <a:lumMod val="65000"/>
+                        </a:schemeClr>
+                      </a:solidFill>
+                      <a:prstDash val="solid"/>
+                      <a:round/>
+                      <a:headEnd type="none" w="med" len="med"/>
+                      <a:tailEnd type="none" w="med" len="med"/>
+                    </a:lnL>
+                    <a:lnR w="12700" cap="flat" cmpd="sng" algn="ctr">
+                      <a:solidFill>
+                        <a:schemeClr val="tx1">
+                          <a:lumMod val="65000"/>
+                        </a:schemeClr>
+                      </a:solidFill>
+                      <a:prstDash val="solid"/>
+                      <a:round/>
+                      <a:headEnd type="none" w="med" len="med"/>
+                      <a:tailEnd type="none" w="med" len="med"/>
+                    </a:lnR>
+                    <a:lnT w="12700" cap="flat" cmpd="sng" algn="ctr">
+                      <a:solidFill>
+                        <a:schemeClr val="tx1">
+                          <a:lumMod val="65000"/>
+                        </a:schemeClr>
+                      </a:solidFill>
+                      <a:prstDash val="solid"/>
+                      <a:round/>
+                      <a:headEnd type="none" w="med" len="med"/>
+                      <a:tailEnd type="none" w="med" len="med"/>
+                    </a:lnT>
+                    <a:lnB w="12700" cap="flat" cmpd="sng" algn="ctr">
+                      <a:solidFill>
+                        <a:schemeClr val="tx1">
+                          <a:lumMod val="65000"/>
+                        </a:schemeClr>
+                      </a:solidFill>
+                      <a:prstDash val="solid"/>
+                      <a:round/>
+                      <a:headEnd type="none" w="med" len="med"/>
+                      <a:tailEnd type="none" w="med" len="med"/>
+                    </a:lnB>
+                    <a:lnTlToBr w="12700" cmpd="sng">
+                      <a:noFill/>
+                      <a:prstDash val="solid"/>
+                    </a:lnTlToBr>
+                    <a:lnBlToTr w="12700" cmpd="sng">
+                      <a:noFill/>
+                      <a:prstDash val="solid"/>
+                    </a:lnBlToTr>
+                    <a:solidFill>
+                      <a:srgbClr val="671E75"/>
+                    </a:solidFill>
+                  </a:tcPr>
+                </a:tc>
+                <a:extLst>
+                  <a:ext uri="{0D108BD9-81ED-4DB2-BD59-A6C34878D82A}">
+                    <a16:rowId xmlns:a16="http://schemas.microsoft.com/office/drawing/2014/main" val="10001"/>
+                  </a:ext>
+                </a:extLst>
+              </a:tr>
+              <a:tr h="6071210">
+                <a:tc>
+                  <a:txBody>
+                    <a:bodyPr/>
+                    <a:lstStyle/>
+                    <a:p>
+                      <a:pPr marL="0" marR="0" lvl="0" indent="0" algn="ctr" defTabSz="914400" rtl="0" eaLnBrk="1" fontAlgn="auto" latinLnBrk="0" hangingPunct="1">
+                        <a:lnSpc>
+                          <a:spcPct val="100000"/>
+                        </a:lnSpc>
+                        <a:spcBef>
+                          <a:spcPts val="0"/>
+                        </a:spcBef>
+                        <a:spcAft>
+                          <a:spcPts val="0"/>
+                        </a:spcAft>
+                        <a:buClrTx/>
+                        <a:buSzTx/>
+                        <a:buNone/>
+                        <a:tabLst/>
+                        <a:defRPr/>
+                      </a:pPr>
+                      <a:r>
+                        <a:rPr lang="en-US" sz="1100" b="1" kern="1200" baseline="0" dirty="0">
+                          <a:solidFill>
+                            <a:schemeClr val="bg1"/>
+                          </a:solidFill>
+                          <a:latin typeface="Open Sans"/>
+                          <a:ea typeface="Open Sans"/>
+                          <a:cs typeface="Open Sans"/>
+                        </a:rPr>
+                        <a:t>Service Now</a:t>
+                      </a:r>
+                      <a:endParaRPr lang="en-US" sz="1100" dirty="0"/>
+                    </a:p>
+                  </a:txBody>
+                  <a:tcPr marT="18288" marB="18288" anchor="ctr">
+                    <a:lnL w="12700" cap="flat" cmpd="sng" algn="ctr">
+                      <a:solidFill>
+                        <a:schemeClr val="tx1">
+                          <a:lumMod val="65000"/>
+                        </a:schemeClr>
+                      </a:solidFill>
+                      <a:prstDash val="solid"/>
+                      <a:round/>
+                      <a:headEnd type="none" w="med" len="med"/>
+                      <a:tailEnd type="none" w="med" len="med"/>
+                    </a:lnL>
+                    <a:lnR w="12700" cap="flat" cmpd="sng" algn="ctr">
+                      <a:solidFill>
+                        <a:schemeClr val="tx1">
+                          <a:lumMod val="65000"/>
+                        </a:schemeClr>
+                      </a:solidFill>
+                      <a:prstDash val="solid"/>
+                      <a:round/>
+                      <a:headEnd type="none" w="med" len="med"/>
+                      <a:tailEnd type="none" w="med" len="med"/>
+                    </a:lnR>
+                    <a:lnT w="12700" cap="flat" cmpd="sng" algn="ctr">
+                      <a:solidFill>
+                        <a:schemeClr val="tx1">
+                          <a:lumMod val="65000"/>
+                        </a:schemeClr>
+                      </a:solidFill>
+                      <a:prstDash val="solid"/>
+                      <a:round/>
+                      <a:headEnd type="none" w="med" len="med"/>
+                      <a:tailEnd type="none" w="med" len="med"/>
+                    </a:lnT>
+                    <a:lnB w="12700" cap="flat" cmpd="sng" algn="ctr">
+                      <a:solidFill>
+                        <a:schemeClr val="tx1">
+                          <a:lumMod val="65000"/>
+                        </a:schemeClr>
+                      </a:solidFill>
+                      <a:prstDash val="solid"/>
+                      <a:round/>
+                      <a:headEnd type="none" w="med" len="med"/>
+                      <a:tailEnd type="none" w="med" len="med"/>
+                    </a:lnB>
+                    <a:noFill/>
+                  </a:tcPr>
+                </a:tc>
+                <a:tc>
+                  <a:txBody>
+                    <a:bodyPr/>
+                    <a:lstStyle/>
+                    <a:p>
+                      <a:pPr marL="0" marR="0" lvl="0" indent="0" algn="ctr" defTabSz="914400" rtl="0" eaLnBrk="1" fontAlgn="auto" latinLnBrk="0" hangingPunct="1">
+                        <a:lnSpc>
+                          <a:spcPct val="100000"/>
+                        </a:lnSpc>
+                        <a:spcBef>
+                          <a:spcPts val="400"/>
+                        </a:spcBef>
+                        <a:spcAft>
+                          <a:spcPts val="0"/>
+                        </a:spcAft>
+                        <a:buClrTx/>
+                        <a:buSzTx/>
+                        <a:buFont typeface="Arial" panose="020B0604020202020204" pitchFamily="34" charset="0"/>
+                        <a:buNone/>
+                        <a:tabLst/>
+                        <a:defRPr/>
+                      </a:pPr>
+                      <a:r>
+                        <a:rPr lang="en-US" sz="3600" b="1" i="0" u="none" strike="noStrike" kern="1200" cap="none" spc="0" normalizeH="0" baseline="0" noProof="0">
+                          <a:ln>
+                            <a:noFill/>
+                          </a:ln>
+                          <a:solidFill>
+                            <a:srgbClr val="00B050"/>
+                          </a:solidFill>
+                          <a:effectLst/>
+                          <a:uLnTx/>
+                          <a:uFillTx/>
+                          <a:latin typeface="Open Sans"/>
+                          <a:ea typeface="Open Sans"/>
+                          <a:cs typeface="Open Sans"/>
+                        </a:rPr>
+                        <a:t>●</a:t>
+                      </a:r>
+                      <a:endParaRPr kumimoji="0" lang="en-US" sz="3600" b="0" i="0" u="none" strike="noStrike" kern="1200" cap="none" spc="0" normalizeH="0" baseline="0" noProof="0">
+                        <a:ln>
+                          <a:noFill/>
+                        </a:ln>
+                        <a:solidFill>
+                          <a:srgbClr val="00B050"/>
+                        </a:solidFill>
+                        <a:effectLst/>
+                        <a:uLnTx/>
+                        <a:uFillTx/>
+                        <a:latin typeface="Open Sans"/>
+                        <a:ea typeface="Open Sans"/>
+                        <a:cs typeface="Open Sans"/>
+                      </a:endParaRPr>
+                    </a:p>
+                  </a:txBody>
+                  <a:tcPr marT="18288" marB="18288" anchor="ctr">
+                    <a:lnL w="12700" cap="flat" cmpd="sng" algn="ctr">
+                      <a:solidFill>
+                        <a:schemeClr val="tx1">
+                          <a:lumMod val="65000"/>
+                        </a:schemeClr>
+                      </a:solidFill>
+                      <a:prstDash val="solid"/>
+                      <a:round/>
+                      <a:headEnd type="none" w="med" len="med"/>
+                      <a:tailEnd type="none" w="med" len="med"/>
+                    </a:lnL>
+                    <a:lnR w="12700" cap="flat" cmpd="sng" algn="ctr">
+                      <a:solidFill>
+                        <a:schemeClr val="tx1">
+                          <a:lumMod val="65000"/>
+                        </a:schemeClr>
+                      </a:solidFill>
+                      <a:prstDash val="solid"/>
+                      <a:round/>
+                      <a:headEnd type="none" w="med" len="med"/>
+                      <a:tailEnd type="none" w="med" len="med"/>
+                    </a:lnR>
+                    <a:lnT w="12700" cap="flat" cmpd="sng" algn="ctr">
+                      <a:solidFill>
+                        <a:schemeClr val="tx1">
+                          <a:lumMod val="65000"/>
+                        </a:schemeClr>
+                      </a:solidFill>
+                      <a:prstDash val="solid"/>
+                      <a:round/>
+                      <a:headEnd type="none" w="med" len="med"/>
+                      <a:tailEnd type="none" w="med" len="med"/>
+                    </a:lnT>
+                    <a:lnB w="12700" cap="flat" cmpd="sng" algn="ctr">
+                      <a:solidFill>
+                        <a:schemeClr val="tx1">
+                          <a:lumMod val="65000"/>
+                        </a:schemeClr>
+                      </a:solidFill>
+                      <a:prstDash val="solid"/>
+                      <a:round/>
+                      <a:headEnd type="none" w="med" len="med"/>
+                      <a:tailEnd type="none" w="med" len="med"/>
+                    </a:lnB>
+                    <a:lnTlToBr w="12700" cmpd="sng">
+                      <a:noFill/>
+                      <a:prstDash val="solid"/>
+                    </a:lnTlToBr>
+                    <a:lnBlToTr w="12700" cmpd="sng">
+                      <a:noFill/>
+                      <a:prstDash val="solid"/>
+                    </a:lnBlToTr>
+                    <a:noFill/>
+                  </a:tcPr>
+                </a:tc>
+                <a:tc>
+                  <a:txBody>
+                    <a:bodyPr/>
+                    <a:lstStyle/>
+                    <a:p>
+                      <a:pPr marL="0" lvl="0" indent="0" algn="l">
+                        <a:lnSpc>
+                          <a:spcPct val="100000"/>
+                        </a:lnSpc>
+                        <a:spcBef>
+                          <a:spcPts val="0"/>
+                        </a:spcBef>
+                        <a:spcAft>
+                          <a:spcPts val="0"/>
+                        </a:spcAft>
+                        <a:buFont typeface="Arial"/>
+                        <a:buNone/>
+                      </a:pPr>
+                      <a:endParaRPr lang="en-US" sz="1000" b="0" i="0" u="none" strike="noStrike" noProof="0" dirty="0">
+                        <a:solidFill>
+                          <a:schemeClr val="bg1"/>
+                        </a:solidFill>
+                      </a:endParaRPr>
+                    </a:p>
+                  </a:txBody>
+                  <a:tcPr marT="18288" marB="18288" anchor="ctr">
+                    <a:lnL w="12700" cap="flat" cmpd="sng" algn="ctr">
+                      <a:solidFill>
+                        <a:schemeClr val="tx1">
+                          <a:lumMod val="65000"/>
+                        </a:schemeClr>
+                      </a:solidFill>
+                      <a:prstDash val="solid"/>
+                      <a:round/>
+                      <a:headEnd type="none" w="med" len="med"/>
+                      <a:tailEnd type="none" w="med" len="med"/>
+                    </a:lnL>
+                    <a:lnR w="12700" cap="flat" cmpd="sng" algn="ctr">
+                      <a:solidFill>
+                        <a:schemeClr val="tx1">
+                          <a:lumMod val="65000"/>
+                        </a:schemeClr>
+                      </a:solidFill>
+                      <a:prstDash val="solid"/>
+                      <a:round/>
+                      <a:headEnd type="none" w="med" len="med"/>
+                      <a:tailEnd type="none" w="med" len="med"/>
+                    </a:lnR>
+                    <a:lnT w="12700" cap="flat" cmpd="sng" algn="ctr">
+                      <a:solidFill>
+                        <a:schemeClr val="tx1">
+                          <a:lumMod val="65000"/>
+                        </a:schemeClr>
+                      </a:solidFill>
+                      <a:prstDash val="solid"/>
+                      <a:round/>
+                      <a:headEnd type="none" w="med" len="med"/>
+                      <a:tailEnd type="none" w="med" len="med"/>
+                    </a:lnT>
+                    <a:lnB w="12700" cap="flat" cmpd="sng" algn="ctr">
+                      <a:solidFill>
+                        <a:schemeClr val="tx1">
+                          <a:lumMod val="65000"/>
+                        </a:schemeClr>
+                      </a:solidFill>
+                      <a:prstDash val="solid"/>
+                      <a:round/>
+                      <a:headEnd type="none" w="med" len="med"/>
+                      <a:tailEnd type="none" w="med" len="med"/>
+                    </a:lnB>
+                    <a:lnTlToBr w="12700" cmpd="sng">
+                      <a:noFill/>
+                      <a:prstDash val="solid"/>
+                    </a:lnTlToBr>
+                    <a:lnBlToTr w="12700" cmpd="sng">
+                      <a:noFill/>
+                      <a:prstDash val="solid"/>
+                    </a:lnBlToTr>
+                    <a:noFill/>
+                  </a:tcPr>
+                </a:tc>
+                <a:tc>
+                  <a:txBody>
+                    <a:bodyPr/>
+                    <a:lstStyle/>
+                    <a:p>
+                      <a:pPr marL="0" lvl="0" indent="0" algn="just">
+                        <a:lnSpc>
+                          <a:spcPct val="100000"/>
+                        </a:lnSpc>
+                        <a:spcBef>
+                          <a:spcPts val="0"/>
+                        </a:spcBef>
+                        <a:spcAft>
+                          <a:spcPts val="0"/>
+                        </a:spcAft>
+                        <a:buClrTx/>
+                        <a:buSzTx/>
+                        <a:buFont typeface="Arial"/>
+                        <a:buNone/>
+                      </a:pPr>
+                      <a:endParaRPr lang="en-US" sz="1000" dirty="0">
+                        <a:solidFill>
+                          <a:schemeClr val="bg1"/>
+                        </a:solidFill>
+                        <a:latin typeface="Open Sans" panose="020B0606030504020204" pitchFamily="34" charset="0"/>
+                        <a:ea typeface="Open Sans" panose="020B0606030504020204" pitchFamily="34" charset="0"/>
+                        <a:cs typeface="Open Sans" panose="020B0606030504020204" pitchFamily="34" charset="0"/>
+                      </a:endParaRPr>
+                    </a:p>
+                    <a:p>
+                      <a:pPr marL="0" lvl="0" indent="0" algn="just">
+                        <a:lnSpc>
+                          <a:spcPct val="100000"/>
+                        </a:lnSpc>
+                        <a:spcBef>
+                          <a:spcPts val="0"/>
+                        </a:spcBef>
+                        <a:spcAft>
+                          <a:spcPts val="0"/>
+                        </a:spcAft>
+                        <a:buClrTx/>
+                        <a:buSzTx/>
+                        <a:buFont typeface="Arial"/>
+                        <a:buNone/>
+                      </a:pPr>
+                      <a:endParaRPr lang="en-US" sz="1000" dirty="0">
+                        <a:solidFill>
+                          <a:schemeClr val="bg1"/>
+                        </a:solidFill>
+                        <a:latin typeface="Open Sans" panose="020B0606030504020204" pitchFamily="34" charset="0"/>
+                        <a:ea typeface="Open Sans" panose="020B0606030504020204" pitchFamily="34" charset="0"/>
+                        <a:cs typeface="Open Sans" panose="020B0606030504020204" pitchFamily="34" charset="0"/>
+                      </a:endParaRPr>
+                    </a:p>
+                    <a:p>
+                      <a:pPr marL="0" lvl="0" indent="0" algn="just">
+                        <a:lnSpc>
+                          <a:spcPct val="100000"/>
+                        </a:lnSpc>
+                        <a:spcBef>
+                          <a:spcPts val="0"/>
+                        </a:spcBef>
+                        <a:spcAft>
+                          <a:spcPts val="0"/>
+                        </a:spcAft>
+                        <a:buClrTx/>
+                        <a:buSzTx/>
+                        <a:buFont typeface="Arial"/>
+                        <a:buNone/>
+                      </a:pPr>
+                      <a:endParaRPr lang="en-US" sz="1000" b="0" i="0" u="none" strike="noStrike" kern="1200" noProof="0" dirty="0">
+                        <a:solidFill>
+                          <a:srgbClr val="242424"/>
+                        </a:solidFill>
+                        <a:effectLst/>
+                        <a:latin typeface="Open Sans"/>
+                      </a:endParaRPr>
+                    </a:p>
+                  </a:txBody>
+                  <a:tcPr marT="18288" marB="18288" anchor="ctr">
+                    <a:lnL w="12700" cap="flat" cmpd="sng" algn="ctr">
+                      <a:solidFill>
+                        <a:schemeClr val="tx1">
+                          <a:lumMod val="65000"/>
+                        </a:schemeClr>
+                      </a:solidFill>
+                      <a:prstDash val="solid"/>
+                      <a:round/>
+                      <a:headEnd type="none" w="med" len="med"/>
+                      <a:tailEnd type="none" w="med" len="med"/>
+                    </a:lnL>
+                    <a:lnR w="12700" cap="flat" cmpd="sng" algn="ctr">
+                      <a:solidFill>
+                        <a:schemeClr val="tx1">
+                          <a:lumMod val="65000"/>
+                        </a:schemeClr>
+                      </a:solidFill>
+                      <a:prstDash val="solid"/>
+                      <a:round/>
+                      <a:headEnd type="none" w="med" len="med"/>
+                      <a:tailEnd type="none" w="med" len="med"/>
+                    </a:lnR>
+                    <a:lnT w="12700" cap="flat" cmpd="sng" algn="ctr">
+                      <a:solidFill>
+                        <a:schemeClr val="tx1">
+                          <a:lumMod val="65000"/>
+                        </a:schemeClr>
+                      </a:solidFill>
+                      <a:prstDash val="solid"/>
+                      <a:round/>
+                      <a:headEnd type="none" w="med" len="med"/>
+                      <a:tailEnd type="none" w="med" len="med"/>
+                    </a:lnT>
+                    <a:lnB w="12700" cap="flat" cmpd="sng" algn="ctr">
+                      <a:solidFill>
+                        <a:schemeClr val="tx1">
+                          <a:lumMod val="65000"/>
+                        </a:schemeClr>
+                      </a:solidFill>
+                      <a:prstDash val="solid"/>
+                      <a:round/>
+                      <a:headEnd type="none" w="med" len="med"/>
+                      <a:tailEnd type="none" w="med" len="med"/>
+                    </a:lnB>
+                    <a:lnTlToBr w="12700" cmpd="sng">
+                      <a:noFill/>
+                      <a:prstDash val="solid"/>
+                    </a:lnTlToBr>
+                    <a:lnBlToTr w="12700" cmpd="sng">
+                      <a:noFill/>
+                      <a:prstDash val="solid"/>
+                    </a:lnBlToTr>
+                    <a:noFill/>
+                  </a:tcPr>
+                </a:tc>
+                <a:extLst>
+                  <a:ext uri="{0D108BD9-81ED-4DB2-BD59-A6C34878D82A}">
+                    <a16:rowId xmlns:a16="http://schemas.microsoft.com/office/drawing/2014/main" val="4111148647"/>
+                  </a:ext>
+                </a:extLst>
+              </a:tr>
+              <a:tr h="2380063">
+                <a:tc>
+                  <a:txBody>
+                    <a:bodyPr/>
+                    <a:lstStyle/>
+                    <a:p>
+                      <a:pPr marL="0" marR="0" lvl="0" indent="0" algn="ctr" defTabSz="914400" rtl="0" eaLnBrk="1" fontAlgn="auto" latinLnBrk="0" hangingPunct="1">
+                        <a:lnSpc>
+                          <a:spcPct val="100000"/>
+                        </a:lnSpc>
+                        <a:spcBef>
+                          <a:spcPts val="0"/>
+                        </a:spcBef>
+                        <a:spcAft>
+                          <a:spcPts val="0"/>
+                        </a:spcAft>
+                        <a:buClrTx/>
+                        <a:buSzTx/>
+                        <a:buNone/>
+                        <a:tabLst/>
+                        <a:defRPr/>
+                      </a:pPr>
+                      <a:endParaRPr lang="en-US" sz="1100"/>
+                    </a:p>
+                  </a:txBody>
+                  <a:tcPr marT="18288" marB="18288" anchor="ctr">
+                    <a:lnL w="12700" cap="flat" cmpd="sng" algn="ctr">
+                      <a:solidFill>
+                        <a:schemeClr val="tx1">
+                          <a:lumMod val="65000"/>
+                        </a:schemeClr>
+                      </a:solidFill>
+                      <a:prstDash val="solid"/>
+                      <a:round/>
+                      <a:headEnd type="none" w="med" len="med"/>
+                      <a:tailEnd type="none" w="med" len="med"/>
+                    </a:lnL>
+                    <a:lnR w="12700" cap="flat" cmpd="sng" algn="ctr">
+                      <a:solidFill>
+                        <a:schemeClr val="tx1">
+                          <a:lumMod val="65000"/>
+                        </a:schemeClr>
+                      </a:solidFill>
+                      <a:prstDash val="solid"/>
+                      <a:round/>
+                      <a:headEnd type="none" w="med" len="med"/>
+                      <a:tailEnd type="none" w="med" len="med"/>
+                    </a:lnR>
+                    <a:lnT w="12700" cap="flat" cmpd="sng" algn="ctr">
+                      <a:solidFill>
+                        <a:schemeClr val="tx1">
+                          <a:lumMod val="65000"/>
+                        </a:schemeClr>
+                      </a:solidFill>
+                      <a:prstDash val="solid"/>
+                      <a:round/>
+                      <a:headEnd type="none" w="med" len="med"/>
+                      <a:tailEnd type="none" w="med" len="med"/>
+                    </a:lnT>
+                    <a:lnB w="12700" cap="flat" cmpd="sng" algn="ctr">
+                      <a:solidFill>
+                        <a:schemeClr val="tx1">
+                          <a:lumMod val="65000"/>
+                        </a:schemeClr>
+                      </a:solidFill>
+                      <a:prstDash val="solid"/>
+                      <a:round/>
+                      <a:headEnd type="none" w="med" len="med"/>
+                      <a:tailEnd type="none" w="med" len="med"/>
+                    </a:lnB>
+                    <a:noFill/>
+                  </a:tcPr>
+                </a:tc>
+                <a:tc>
+                  <a:txBody>
+                    <a:bodyPr/>
+                    <a:lstStyle/>
+                    <a:p>
+                      <a:pPr marL="0" marR="0" lvl="0" indent="0" algn="ctr" defTabSz="914400" rtl="0" eaLnBrk="1" fontAlgn="auto" latinLnBrk="0" hangingPunct="1">
+                        <a:lnSpc>
+                          <a:spcPct val="100000"/>
+                        </a:lnSpc>
+                        <a:spcBef>
+                          <a:spcPts val="400"/>
+                        </a:spcBef>
+                        <a:spcAft>
+                          <a:spcPts val="0"/>
+                        </a:spcAft>
+                        <a:buClrTx/>
+                        <a:buSzTx/>
+                        <a:buFont typeface="Arial" panose="020B0604020202020204" pitchFamily="34" charset="0"/>
+                        <a:buNone/>
+                        <a:tabLst/>
+                        <a:defRPr/>
+                      </a:pPr>
+                      <a:endParaRPr kumimoji="0" lang="en-US" sz="3600" b="0" i="0" u="none" strike="noStrike" kern="1200" cap="none" spc="0" normalizeH="0" baseline="0" noProof="0">
+                        <a:ln>
+                          <a:noFill/>
+                        </a:ln>
+                        <a:solidFill>
+                          <a:srgbClr val="00B050"/>
+                        </a:solidFill>
+                        <a:effectLst/>
+                        <a:uLnTx/>
+                        <a:uFillTx/>
+                        <a:latin typeface="Open Sans"/>
+                        <a:ea typeface="Open Sans"/>
+                        <a:cs typeface="Open Sans"/>
+                      </a:endParaRPr>
+                    </a:p>
+                  </a:txBody>
+                  <a:tcPr marT="18288" marB="18288" anchor="ctr">
+                    <a:lnL w="12700" cap="flat" cmpd="sng" algn="ctr">
+                      <a:solidFill>
+                        <a:schemeClr val="tx1">
+                          <a:lumMod val="65000"/>
+                        </a:schemeClr>
+                      </a:solidFill>
+                      <a:prstDash val="solid"/>
+                      <a:round/>
+                      <a:headEnd type="none" w="med" len="med"/>
+                      <a:tailEnd type="none" w="med" len="med"/>
+                    </a:lnL>
+                    <a:lnR w="12700" cap="flat" cmpd="sng" algn="ctr">
+                      <a:solidFill>
+                        <a:schemeClr val="tx1">
+                          <a:lumMod val="65000"/>
+                        </a:schemeClr>
+                      </a:solidFill>
+                      <a:prstDash val="solid"/>
+                      <a:round/>
+                      <a:headEnd type="none" w="med" len="med"/>
+                      <a:tailEnd type="none" w="med" len="med"/>
+                    </a:lnR>
+                    <a:lnT w="12700" cap="flat" cmpd="sng" algn="ctr">
+                      <a:solidFill>
+                        <a:schemeClr val="tx1">
+                          <a:lumMod val="65000"/>
+                        </a:schemeClr>
+                      </a:solidFill>
+                      <a:prstDash val="solid"/>
+                      <a:round/>
+                      <a:headEnd type="none" w="med" len="med"/>
+                      <a:tailEnd type="none" w="med" len="med"/>
+                    </a:lnT>
+                    <a:lnB w="12700" cap="flat" cmpd="sng" algn="ctr">
+                      <a:solidFill>
+                        <a:schemeClr val="tx1">
+                          <a:lumMod val="65000"/>
+                        </a:schemeClr>
+                      </a:solidFill>
+                      <a:prstDash val="solid"/>
+                      <a:round/>
+                      <a:headEnd type="none" w="med" len="med"/>
+                      <a:tailEnd type="none" w="med" len="med"/>
+                    </a:lnB>
+                    <a:lnTlToBr w="12700" cmpd="sng">
+                      <a:noFill/>
+                      <a:prstDash val="solid"/>
+                    </a:lnTlToBr>
+                    <a:lnBlToTr w="12700" cmpd="sng">
+                      <a:noFill/>
+                      <a:prstDash val="solid"/>
+                    </a:lnBlToTr>
+                    <a:noFill/>
+                  </a:tcPr>
+                </a:tc>
+                <a:tc>
+                  <a:txBody>
+                    <a:bodyPr/>
+                    <a:lstStyle/>
+                    <a:p>
+                      <a:pPr marL="0" lvl="0" indent="0" algn="l">
+                        <a:lnSpc>
+                          <a:spcPct val="100000"/>
+                        </a:lnSpc>
+                        <a:spcBef>
+                          <a:spcPts val="0"/>
+                        </a:spcBef>
+                        <a:spcAft>
+                          <a:spcPts val="0"/>
+                        </a:spcAft>
+                        <a:buFont typeface="Arial"/>
+                        <a:buNone/>
+                      </a:pPr>
+                      <a:endParaRPr lang="en-US" sz="1000" b="0" i="0" u="none" strike="noStrike" noProof="0">
+                        <a:solidFill>
+                          <a:schemeClr val="bg1"/>
+                        </a:solidFill>
+                      </a:endParaRPr>
+                    </a:p>
+                  </a:txBody>
+                  <a:tcPr marT="18288" marB="18288" anchor="ctr">
+                    <a:lnL w="12700" cap="flat" cmpd="sng" algn="ctr">
+                      <a:solidFill>
+                        <a:schemeClr val="tx1">
+                          <a:lumMod val="65000"/>
+                        </a:schemeClr>
+                      </a:solidFill>
+                      <a:prstDash val="solid"/>
+                      <a:round/>
+                      <a:headEnd type="none" w="med" len="med"/>
+                      <a:tailEnd type="none" w="med" len="med"/>
+                    </a:lnL>
+                    <a:lnR w="12700" cap="flat" cmpd="sng" algn="ctr">
+                      <a:solidFill>
+                        <a:schemeClr val="tx1">
+                          <a:lumMod val="65000"/>
+                        </a:schemeClr>
+                      </a:solidFill>
+                      <a:prstDash val="solid"/>
+                      <a:round/>
+                      <a:headEnd type="none" w="med" len="med"/>
+                      <a:tailEnd type="none" w="med" len="med"/>
+                    </a:lnR>
+                    <a:lnT w="12700" cap="flat" cmpd="sng" algn="ctr">
+                      <a:solidFill>
+                        <a:schemeClr val="tx1">
+                          <a:lumMod val="65000"/>
+                        </a:schemeClr>
+                      </a:solidFill>
+                      <a:prstDash val="solid"/>
+                      <a:round/>
+                      <a:headEnd type="none" w="med" len="med"/>
+                      <a:tailEnd type="none" w="med" len="med"/>
+                    </a:lnT>
+                    <a:lnB w="12700" cap="flat" cmpd="sng" algn="ctr">
+                      <a:solidFill>
+                        <a:schemeClr val="tx1">
+                          <a:lumMod val="65000"/>
+                        </a:schemeClr>
+                      </a:solidFill>
+                      <a:prstDash val="solid"/>
+                      <a:round/>
+                      <a:headEnd type="none" w="med" len="med"/>
+                      <a:tailEnd type="none" w="med" len="med"/>
+                    </a:lnB>
+                    <a:lnTlToBr w="12700" cmpd="sng">
+                      <a:noFill/>
+                      <a:prstDash val="solid"/>
+                    </a:lnTlToBr>
+                    <a:lnBlToTr w="12700" cmpd="sng">
+                      <a:noFill/>
+                      <a:prstDash val="solid"/>
+                    </a:lnBlToTr>
+                    <a:noFill/>
+                  </a:tcPr>
+                </a:tc>
+                <a:tc>
+                  <a:txBody>
+                    <a:bodyPr/>
+                    <a:lstStyle/>
+                    <a:p>
+                      <a:pPr marL="0" lvl="0" indent="0" algn="just">
+                        <a:lnSpc>
+                          <a:spcPct val="100000"/>
+                        </a:lnSpc>
+                        <a:spcBef>
+                          <a:spcPts val="0"/>
+                        </a:spcBef>
+                        <a:spcAft>
+                          <a:spcPts val="0"/>
+                        </a:spcAft>
+                        <a:buClrTx/>
+                        <a:buSzTx/>
+                        <a:buFont typeface="Arial"/>
+                        <a:buNone/>
+                      </a:pPr>
+                      <a:endParaRPr lang="en-US" sz="1000" b="0" i="0" u="none" strike="noStrike" kern="1200" noProof="0" dirty="0">
+                        <a:solidFill>
+                          <a:srgbClr val="242424"/>
+                        </a:solidFill>
+                        <a:effectLst/>
+                        <a:latin typeface="Open Sans"/>
+                      </a:endParaRPr>
+                    </a:p>
+                  </a:txBody>
+                  <a:tcPr marT="18288" marB="18288" anchor="ctr">
+                    <a:lnL w="12700" cap="flat" cmpd="sng" algn="ctr">
+                      <a:solidFill>
+                        <a:schemeClr val="tx1">
+                          <a:lumMod val="65000"/>
+                        </a:schemeClr>
+                      </a:solidFill>
+                      <a:prstDash val="solid"/>
+                      <a:round/>
+                      <a:headEnd type="none" w="med" len="med"/>
+                      <a:tailEnd type="none" w="med" len="med"/>
+                    </a:lnL>
+                    <a:lnR w="12700" cap="flat" cmpd="sng" algn="ctr">
+                      <a:solidFill>
+                        <a:schemeClr val="tx1">
+                          <a:lumMod val="65000"/>
+                        </a:schemeClr>
+                      </a:solidFill>
+                      <a:prstDash val="solid"/>
+                      <a:round/>
+                      <a:headEnd type="none" w="med" len="med"/>
+                      <a:tailEnd type="none" w="med" len="med"/>
+                    </a:lnR>
+                    <a:lnT w="12700" cap="flat" cmpd="sng" algn="ctr">
+                      <a:solidFill>
+                        <a:schemeClr val="tx1">
+                          <a:lumMod val="65000"/>
+                        </a:schemeClr>
+                      </a:solidFill>
+                      <a:prstDash val="solid"/>
+                      <a:round/>
+                      <a:headEnd type="none" w="med" len="med"/>
+                      <a:tailEnd type="none" w="med" len="med"/>
+                    </a:lnT>
+                    <a:lnB w="12700" cap="flat" cmpd="sng" algn="ctr">
+                      <a:solidFill>
+                        <a:schemeClr val="tx1">
+                          <a:lumMod val="65000"/>
+                        </a:schemeClr>
+                      </a:solidFill>
+                      <a:prstDash val="solid"/>
+                      <a:round/>
+                      <a:headEnd type="none" w="med" len="med"/>
+                      <a:tailEnd type="none" w="med" len="med"/>
+                    </a:lnB>
+                    <a:lnTlToBr w="12700" cmpd="sng">
+                      <a:noFill/>
+                      <a:prstDash val="solid"/>
+                    </a:lnTlToBr>
+                    <a:lnBlToTr w="12700" cmpd="sng">
+                      <a:noFill/>
+                      <a:prstDash val="solid"/>
+                    </a:lnBlToTr>
+                    <a:noFill/>
+                  </a:tcPr>
+                </a:tc>
+                <a:extLst>
+                  <a:ext uri="{0D108BD9-81ED-4DB2-BD59-A6C34878D82A}">
+                    <a16:rowId xmlns:a16="http://schemas.microsoft.com/office/drawing/2014/main" val="3908796021"/>
+                  </a:ext>
+                </a:extLst>
+              </a:tr>
+            </a:tbl>
+          </a:graphicData>
+        </a:graphic>
+      </p:graphicFrame>
+      <p:sp>
+        <p:nvSpPr>
+          <p:cNvPr id="3" name="Title 8">
+            <a:extLst>
+              <a:ext uri="{FF2B5EF4-FFF2-40B4-BE49-F238E27FC236}">
+                <a16:creationId xmlns:a16="http://schemas.microsoft.com/office/drawing/2014/main" id="{1FE6163C-F534-0490-8070-26B99DDD6E22}"/>
+              </a:ext>
+            </a:extLst>
+          </p:cNvPr>
+          <p:cNvSpPr txBox="1">
+            <a:spLocks/>
+          </p:cNvSpPr>
+          <p:nvPr/>
+        </p:nvSpPr>
+        <p:spPr>
+          <a:xfrm>
+            <a:off x="-1" y="0"/>
+            <a:ext cx="12192001" cy="445692"/>
+          </a:xfrm>
+          <a:prstGeom prst="rect">
+            <a:avLst/>
+          </a:prstGeom>
+          <a:solidFill>
+            <a:srgbClr val="671E75"/>
+          </a:solidFill>
+        </p:spPr>
+        <p:txBody>
+          <a:bodyPr vert="horz" lIns="0" tIns="45720" rIns="0" bIns="0" rtlCol="0" anchor="ctr" anchorCtr="0">
+            <a:noAutofit/>
+          </a:bodyPr>
+          <a:lstStyle>
+            <a:lvl1pPr algn="l" defTabSz="914400" rtl="0" eaLnBrk="1" latinLnBrk="0" hangingPunct="1">
+              <a:lnSpc>
+                <a:spcPct val="90000"/>
+              </a:lnSpc>
+              <a:spcBef>
+                <a:spcPct val="0"/>
+              </a:spcBef>
+              <a:buNone/>
+              <a:defRPr lang="en-US" sz="3600" kern="1200" spc="-75" dirty="0">
+                <a:solidFill>
+                  <a:schemeClr val="tx1"/>
+                </a:solidFill>
+                <a:latin typeface="+mj-lt"/>
+                <a:ea typeface="+mj-ea"/>
+                <a:cs typeface="+mj-cs"/>
+              </a:defRPr>
+            </a:lvl1pPr>
+          </a:lstStyle>
+          <a:p>
+            <a:pPr algn="ctr"/>
+            <a:r>
+              <a:rPr lang="en-US" sz="2400" b="1" dirty="0">
+                <a:solidFill>
+                  <a:srgbClr val="FFFFFF"/>
+                </a:solidFill>
+                <a:latin typeface="Open Sans"/>
+                <a:ea typeface="Open Sans"/>
+                <a:cs typeface="Open Sans"/>
+              </a:rPr>
+              <a:t>Week Ending </a:t>
+            </a:r>
+            <a:r>
+              <a:rPr lang="en-US" sz="2400" b="1" dirty="0" err="1">
+                <a:solidFill>
+                  <a:srgbClr val="FFFFFF"/>
+                </a:solidFill>
+                <a:latin typeface="Open Sans"/>
+                <a:ea typeface="Open Sans"/>
+                <a:cs typeface="Open Sans"/>
+              </a:rPr>
+              <a:t>shortDate</a:t>
+            </a:r>
+            <a:r>
+              <a:rPr lang="en-US" sz="2400" b="1" dirty="0">
+                <a:solidFill>
+                  <a:srgbClr val="FFFFFF"/>
+                </a:solidFill>
+                <a:latin typeface="Open Sans"/>
+                <a:ea typeface="Open Sans"/>
+                <a:cs typeface="Open Sans"/>
+              </a:rPr>
+              <a:t> - Work Packet Status Report</a:t>
+            </a:r>
+          </a:p>
+        </p:txBody>
+      </p:sp>
+    </p:spTree>
+    <p:extLst>
+      <p:ext uri="{BB962C8B-B14F-4D97-AF65-F5344CB8AC3E}">
+        <p14:creationId xmlns:p14="http://schemas.microsoft.com/office/powerpoint/2010/main" val="2909823911"/>
+      </p:ext>
+    </p:extLst>
+  </p:cSld>
+  <p:clrMapOvr>
+    <a:masterClrMapping/>
+  </p:clrMapOvr>
+</p:sld>
+</file>
+
+<file path=ppt/slides/slide9.xml><?xml version="1.0" encoding="utf-8"?>
 <p:sld xmlns:a="http://schemas.openxmlformats.org/drawingml/2006/main" xmlns:r="http://schemas.openxmlformats.org/officeDocument/2006/relationships" xmlns:p="http://schemas.openxmlformats.org/presentationml/2006/main">
   <p:cSld>
     <p:spTree>
@@ -25582,343 +27422,6 @@
 </p:sld>
 </file>
 
-<file path=ppt/slides/slide9.xml><?xml version="1.0" encoding="utf-8"?>
-<p:sld xmlns:a="http://schemas.openxmlformats.org/drawingml/2006/main" xmlns:r="http://schemas.openxmlformats.org/officeDocument/2006/relationships" xmlns:p="http://schemas.openxmlformats.org/presentationml/2006/main">
-  <p:cSld>
-    <p:spTree>
-      <p:nvGrpSpPr>
-        <p:cNvPr id="1" name=""/>
-        <p:cNvGrpSpPr/>
-        <p:nvPr/>
-      </p:nvGrpSpPr>
-      <p:grpSpPr>
-        <a:xfrm>
-          <a:off x="0" y="0"/>
-          <a:ext cx="0" cy="0"/>
-          <a:chOff x="0" y="0"/>
-          <a:chExt cx="0" cy="0"/>
-        </a:xfrm>
-      </p:grpSpPr>
-      <p:graphicFrame>
-        <p:nvGraphicFramePr>
-          <p:cNvPr id="29" name="Object 28" hidden="1">
-            <a:extLst>
-              <a:ext uri="{FF2B5EF4-FFF2-40B4-BE49-F238E27FC236}">
-                <a16:creationId xmlns:a16="http://schemas.microsoft.com/office/drawing/2014/main" id="{3636E115-5E1B-4F14-AF9E-7710AEBB7D1A}"/>
-              </a:ext>
-            </a:extLst>
-          </p:cNvPr>
-          <p:cNvGraphicFramePr>
-            <a:graphicFrameLocks noChangeAspect="1"/>
-          </p:cNvGraphicFramePr>
-          <p:nvPr>
-            <p:custDataLst>
-              <p:tags r:id="rId1"/>
-            </p:custDataLst>
-          </p:nvPr>
-        </p:nvGraphicFramePr>
-        <p:xfrm>
-          <a:off x="1588" y="1588"/>
-          <a:ext cx="1588" cy="1588"/>
-        </p:xfrm>
-        <a:graphic>
-          <a:graphicData uri="http://schemas.openxmlformats.org/presentationml/2006/ole">
-            <mc:AlternateContent xmlns:mc="http://schemas.openxmlformats.org/markup-compatibility/2006">
-              <mc:Choice xmlns:v="urn:schemas-microsoft-com:vml" Requires="v">
-                <p:oleObj name="think-cell Slide" r:id="rId5" imgW="395" imgH="396" progId="TCLayout.ActiveDocument.1">
-                  <p:embed/>
-                </p:oleObj>
-              </mc:Choice>
-              <mc:Fallback>
-                <p:oleObj name="think-cell Slide" r:id="rId5" imgW="395" imgH="396" progId="TCLayout.ActiveDocument.1">
-                  <p:embed/>
-                  <p:pic>
-                    <p:nvPicPr>
-                      <p:cNvPr id="29" name="Object 28" hidden="1">
-                        <a:extLst>
-                          <a:ext uri="{FF2B5EF4-FFF2-40B4-BE49-F238E27FC236}">
-                            <a16:creationId xmlns:a16="http://schemas.microsoft.com/office/drawing/2014/main" id="{3636E115-5E1B-4F14-AF9E-7710AEBB7D1A}"/>
-                          </a:ext>
-                        </a:extLst>
-                      </p:cNvPr>
-                      <p:cNvPicPr/>
-                      <p:nvPr/>
-                    </p:nvPicPr>
-                    <p:blipFill>
-                      <a:blip r:embed="rId6"/>
-                      <a:stretch>
-                        <a:fillRect/>
-                      </a:stretch>
-                    </p:blipFill>
-                    <p:spPr>
-                      <a:xfrm>
-                        <a:off x="1588" y="1588"/>
-                        <a:ext cx="1588" cy="1588"/>
-                      </a:xfrm>
-                      <a:prstGeom prst="rect">
-                        <a:avLst/>
-                      </a:prstGeom>
-                    </p:spPr>
-                  </p:pic>
-                </p:oleObj>
-              </mc:Fallback>
-            </mc:AlternateContent>
-          </a:graphicData>
-        </a:graphic>
-      </p:graphicFrame>
-      <p:sp>
-        <p:nvSpPr>
-          <p:cNvPr id="28" name="Rectangle 27" hidden="1">
-            <a:extLst>
-              <a:ext uri="{FF2B5EF4-FFF2-40B4-BE49-F238E27FC236}">
-                <a16:creationId xmlns:a16="http://schemas.microsoft.com/office/drawing/2014/main" id="{3803FD3E-B1A5-4B86-827A-87806B3A1A90}"/>
-              </a:ext>
-            </a:extLst>
-          </p:cNvPr>
-          <p:cNvSpPr/>
-          <p:nvPr>
-            <p:custDataLst>
-              <p:tags r:id="rId2"/>
-            </p:custDataLst>
-          </p:nvPr>
-        </p:nvSpPr>
-        <p:spPr>
-          <a:xfrm>
-            <a:off x="0" y="0"/>
-            <a:ext cx="158750" cy="158750"/>
-          </a:xfrm>
-          <a:prstGeom prst="rect">
-            <a:avLst/>
-          </a:prstGeom>
-        </p:spPr>
-        <p:style>
-          <a:lnRef idx="2">
-            <a:schemeClr val="accent1">
-              <a:shade val="50000"/>
-            </a:schemeClr>
-          </a:lnRef>
-          <a:fillRef idx="1">
-            <a:schemeClr val="accent1"/>
-          </a:fillRef>
-          <a:effectRef idx="0">
-            <a:schemeClr val="accent1"/>
-          </a:effectRef>
-          <a:fontRef idx="minor">
-            <a:schemeClr val="lt1"/>
-          </a:fontRef>
-        </p:style>
-        <p:txBody>
-          <a:bodyPr vert="horz" wrap="none" lIns="0" tIns="0" rIns="0" bIns="0" numCol="1" spcCol="0" rtlCol="0" anchor="ctr" anchorCtr="0">
-            <a:noAutofit/>
-          </a:bodyPr>
-          <a:lstStyle/>
-          <a:p>
-            <a:pPr algn="ctr">
-              <a:lnSpc>
-                <a:spcPct val="80000"/>
-              </a:lnSpc>
-              <a:spcBef>
-                <a:spcPct val="0"/>
-              </a:spcBef>
-              <a:spcAft>
-                <a:spcPct val="0"/>
-              </a:spcAft>
-            </a:pPr>
-            <a:endParaRPr lang="en-US" sz="3600">
-              <a:latin typeface="Chronicle Display Black" pitchFamily="50" charset="0"/>
-              <a:sym typeface="Chronicle Display Black" pitchFamily="50" charset="0"/>
-            </a:endParaRPr>
-          </a:p>
-        </p:txBody>
-      </p:sp>
-      <p:graphicFrame>
-        <p:nvGraphicFramePr>
-          <p:cNvPr id="12" name="Chart 11">
-            <a:extLst>
-              <a:ext uri="{FF2B5EF4-FFF2-40B4-BE49-F238E27FC236}">
-                <a16:creationId xmlns:a16="http://schemas.microsoft.com/office/drawing/2014/main" id="{9593DCDB-F8CB-49B3-9AEF-CFC9146AC87D}"/>
-              </a:ext>
-            </a:extLst>
-          </p:cNvPr>
-          <p:cNvGraphicFramePr>
-            <a:graphicFrameLocks/>
-          </p:cNvGraphicFramePr>
-          <p:nvPr>
-            <p:extLst>
-              <p:ext uri="{D42A27DB-BD31-4B8C-83A1-F6EECF244321}">
-                <p14:modId xmlns:p14="http://schemas.microsoft.com/office/powerpoint/2010/main" val="1267032336"/>
-              </p:ext>
-            </p:extLst>
-          </p:nvPr>
-        </p:nvGraphicFramePr>
-        <p:xfrm>
-          <a:off x="3803207" y="3599644"/>
-          <a:ext cx="4585587" cy="2250787"/>
-        </p:xfrm>
-        <a:graphic>
-          <a:graphicData uri="http://schemas.openxmlformats.org/drawingml/2006/chart">
-            <c:chart xmlns:c="http://schemas.openxmlformats.org/drawingml/2006/chart" xmlns:r="http://schemas.openxmlformats.org/officeDocument/2006/relationships" r:id="rId7"/>
-          </a:graphicData>
-        </a:graphic>
-      </p:graphicFrame>
-      <p:graphicFrame>
-        <p:nvGraphicFramePr>
-          <p:cNvPr id="4" name="Chart 3">
-            <a:extLst>
-              <a:ext uri="{FF2B5EF4-FFF2-40B4-BE49-F238E27FC236}">
-                <a16:creationId xmlns:a16="http://schemas.microsoft.com/office/drawing/2014/main" id="{8F73F8B6-D25E-47F2-BFFD-FDD187ABD360}"/>
-              </a:ext>
-            </a:extLst>
-          </p:cNvPr>
-          <p:cNvGraphicFramePr>
-            <a:graphicFrameLocks/>
-          </p:cNvGraphicFramePr>
-          <p:nvPr>
-            <p:extLst>
-              <p:ext uri="{D42A27DB-BD31-4B8C-83A1-F6EECF244321}">
-                <p14:modId xmlns:p14="http://schemas.microsoft.com/office/powerpoint/2010/main" val="4271630676"/>
-              </p:ext>
-            </p:extLst>
-          </p:nvPr>
-        </p:nvGraphicFramePr>
-        <p:xfrm>
-          <a:off x="867956" y="1124561"/>
-          <a:ext cx="4689766" cy="2304439"/>
-        </p:xfrm>
-        <a:graphic>
-          <a:graphicData uri="http://schemas.openxmlformats.org/drawingml/2006/chart">
-            <c:chart xmlns:c="http://schemas.openxmlformats.org/drawingml/2006/chart" xmlns:r="http://schemas.openxmlformats.org/officeDocument/2006/relationships" r:id="rId8"/>
-          </a:graphicData>
-        </a:graphic>
-      </p:graphicFrame>
-      <p:graphicFrame>
-        <p:nvGraphicFramePr>
-          <p:cNvPr id="8" name="Chart 7">
-            <a:extLst>
-              <a:ext uri="{FF2B5EF4-FFF2-40B4-BE49-F238E27FC236}">
-                <a16:creationId xmlns:a16="http://schemas.microsoft.com/office/drawing/2014/main" id="{8E2596A8-71AF-EF69-987B-E337D646CAB8}"/>
-              </a:ext>
-            </a:extLst>
-          </p:cNvPr>
-          <p:cNvGraphicFramePr/>
-          <p:nvPr>
-            <p:extLst>
-              <p:ext uri="{D42A27DB-BD31-4B8C-83A1-F6EECF244321}">
-                <p14:modId xmlns:p14="http://schemas.microsoft.com/office/powerpoint/2010/main" val="695408599"/>
-              </p:ext>
-            </p:extLst>
-          </p:nvPr>
-        </p:nvGraphicFramePr>
-        <p:xfrm>
-          <a:off x="7126575" y="1178212"/>
-          <a:ext cx="3596750" cy="2250787"/>
-        </p:xfrm>
-        <a:graphic>
-          <a:graphicData uri="http://schemas.openxmlformats.org/drawingml/2006/chart">
-            <c:chart xmlns:c="http://schemas.openxmlformats.org/drawingml/2006/chart" xmlns:r="http://schemas.openxmlformats.org/officeDocument/2006/relationships" r:id="rId9"/>
-          </a:graphicData>
-        </a:graphic>
-      </p:graphicFrame>
-      <p:sp>
-        <p:nvSpPr>
-          <p:cNvPr id="3" name="Title 8">
-            <a:extLst>
-              <a:ext uri="{FF2B5EF4-FFF2-40B4-BE49-F238E27FC236}">
-                <a16:creationId xmlns:a16="http://schemas.microsoft.com/office/drawing/2014/main" id="{76C02369-2DE7-DFC3-A69E-5A0A1AE1D969}"/>
-              </a:ext>
-            </a:extLst>
-          </p:cNvPr>
-          <p:cNvSpPr txBox="1">
-            <a:spLocks/>
-          </p:cNvSpPr>
-          <p:nvPr/>
-        </p:nvSpPr>
-        <p:spPr>
-          <a:xfrm>
-            <a:off x="1" y="0"/>
-            <a:ext cx="12200234" cy="464218"/>
-          </a:xfrm>
-          <a:prstGeom prst="rect">
-            <a:avLst/>
-          </a:prstGeom>
-          <a:solidFill>
-            <a:srgbClr val="671E75"/>
-          </a:solidFill>
-        </p:spPr>
-        <p:txBody>
-          <a:bodyPr vert="horz" lIns="0" tIns="45720" rIns="0" bIns="0" rtlCol="0" anchor="ctr" anchorCtr="0">
-            <a:noAutofit/>
-          </a:bodyPr>
-          <a:lstStyle>
-            <a:lvl1pPr algn="l" defTabSz="914400" rtl="0" eaLnBrk="1" latinLnBrk="0" hangingPunct="1">
-              <a:lnSpc>
-                <a:spcPct val="90000"/>
-              </a:lnSpc>
-              <a:spcBef>
-                <a:spcPct val="0"/>
-              </a:spcBef>
-              <a:buNone/>
-              <a:defRPr lang="en-US" sz="3600" kern="1200" spc="-75" dirty="0">
-                <a:solidFill>
-                  <a:schemeClr val="tx1"/>
-                </a:solidFill>
-                <a:latin typeface="+mj-lt"/>
-                <a:ea typeface="+mj-ea"/>
-                <a:cs typeface="+mj-cs"/>
-              </a:defRPr>
-            </a:lvl1pPr>
-          </a:lstStyle>
-          <a:p>
-            <a:pPr algn="ctr"/>
-            <a:r>
-              <a:rPr lang="en-US" sz="2400" b="1" dirty="0">
-                <a:solidFill>
-                  <a:srgbClr val="FFFFFF"/>
-                </a:solidFill>
-                <a:latin typeface="Open Sans"/>
-                <a:ea typeface="Open Sans"/>
-                <a:cs typeface="Open Sans"/>
-              </a:rPr>
-              <a:t>Week Ending </a:t>
-            </a:r>
-            <a:r>
-              <a:rPr lang="en-US" sz="2400" b="1" dirty="0" err="1">
-                <a:solidFill>
-                  <a:srgbClr val="FFFFFF"/>
-                </a:solidFill>
-                <a:latin typeface="Open Sans"/>
-                <a:ea typeface="Open Sans"/>
-                <a:cs typeface="Open Sans"/>
-              </a:rPr>
-              <a:t>shortDate</a:t>
-            </a:r>
-            <a:r>
-              <a:rPr lang="en-US" sz="2400" b="1" dirty="0">
-                <a:solidFill>
-                  <a:srgbClr val="FFFFFF"/>
-                </a:solidFill>
-                <a:latin typeface="Open Sans"/>
-                <a:ea typeface="Open Sans"/>
-                <a:cs typeface="Open Sans"/>
-              </a:rPr>
-              <a:t> - Work Packet Status Report</a:t>
-            </a:r>
-          </a:p>
-        </p:txBody>
-      </p:sp>
-    </p:spTree>
-    <p:extLst>
-      <p:ext uri="{BB962C8B-B14F-4D97-AF65-F5344CB8AC3E}">
-        <p14:creationId xmlns:p14="http://schemas.microsoft.com/office/powerpoint/2010/main" val="2988166648"/>
-      </p:ext>
-    </p:extLst>
-  </p:cSld>
-  <p:clrMapOvr>
-    <a:masterClrMapping/>
-  </p:clrMapOvr>
-</p:sld>
-</file>
-
 <file path=ppt/tags/tag1.xml><?xml version="1.0" encoding="utf-8"?>
 <p:tagLst xmlns:a="http://schemas.openxmlformats.org/drawingml/2006/main" xmlns:r="http://schemas.openxmlformats.org/officeDocument/2006/relationships" xmlns:p="http://schemas.openxmlformats.org/presentationml/2006/main">
   <p:tag name="THINKCELLSHAPEDONOTDELETE" val="thinkcellActiveDocDoNotDelete"/>
@@ -25962,6 +27465,18 @@
 </file>
 
 <file path=ppt/tags/tag16.xml><?xml version="1.0" encoding="utf-8"?>
+<p:tagLst xmlns:a="http://schemas.openxmlformats.org/drawingml/2006/main" xmlns:r="http://schemas.openxmlformats.org/officeDocument/2006/relationships" xmlns:p="http://schemas.openxmlformats.org/presentationml/2006/main">
+  <p:tag name="THINKCELLSHAPEDONOTDELETE" val="t6FPS2ZriRwOZ_IuZru1j7g"/>
+</p:tagLst>
+</file>
+
+<file path=ppt/tags/tag17.xml><?xml version="1.0" encoding="utf-8"?>
+<p:tagLst xmlns:a="http://schemas.openxmlformats.org/drawingml/2006/main" xmlns:r="http://schemas.openxmlformats.org/officeDocument/2006/relationships" xmlns:p="http://schemas.openxmlformats.org/presentationml/2006/main">
+  <p:tag name="THINKCELLSHAPEDONOTDELETE" val="thinkcellActiveDocDoNotDelete"/>
+</p:tagLst>
+</file>
+
+<file path=ppt/tags/tag18.xml><?xml version="1.0" encoding="utf-8"?>
 <p:tagLst xmlns:a="http://schemas.openxmlformats.org/drawingml/2006/main" xmlns:r="http://schemas.openxmlformats.org/officeDocument/2006/relationships" xmlns:p="http://schemas.openxmlformats.org/presentationml/2006/main">
   <p:tag name="THINKCELLSHAPEDONOTDELETE" val="t6FPS2ZriRwOZ_IuZru1j7g"/>
 </p:tagLst>
@@ -28937,33 +30452,6 @@
 </file>
 
 <file path=customXml/item1.xml><?xml version="1.0" encoding="utf-8"?>
-<?mso-contentType ?>
-<FormTemplates xmlns="http://schemas.microsoft.com/sharepoint/v3/contenttype/forms">
-  <Display>DocumentLibraryForm</Display>
-  <Edit>DocumentLibraryForm</Edit>
-  <New>DocumentLibraryForm</New>
-</FormTemplates>
-</file>
-
-<file path=customXml/item2.xml><?xml version="1.0" encoding="utf-8"?>
-<p:properties xmlns:p="http://schemas.microsoft.com/office/2006/metadata/properties" xmlns:xsi="http://www.w3.org/2001/XMLSchema-instance" xmlns:pc="http://schemas.microsoft.com/office/infopath/2007/PartnerControls">
-  <documentManagement>
-    <SharedWithUsers xmlns="0c8cfcba-b016-4e30-8556-6f1cb7c975af">
-      <UserInfo>
-        <DisplayName>Choudhary, Babita</DisplayName>
-        <AccountId>49</AccountId>
-        <AccountType/>
-      </UserInfo>
-    </SharedWithUsers>
-    <TaxCatchAll xmlns="0c8cfcba-b016-4e30-8556-6f1cb7c975af" xsi:nil="true"/>
-    <lcf76f155ced4ddcb4097134ff3c332f xmlns="21eabdcc-72ab-4064-9f46-5100b1dc17a4">
-      <Terms xmlns="http://schemas.microsoft.com/office/infopath/2007/PartnerControls"/>
-    </lcf76f155ced4ddcb4097134ff3c332f>
-  </documentManagement>
-</p:properties>
-</file>
-
-<file path=customXml/item3.xml><?xml version="1.0" encoding="utf-8"?>
 <ct:contentTypeSchema xmlns:ct="http://schemas.microsoft.com/office/2006/metadata/contentType" xmlns:ma="http://schemas.microsoft.com/office/2006/metadata/properties/metaAttributes" ct:_="" ma:_="" ma:contentTypeName="Document" ma:contentTypeID="0x010100BE5E5BA06A902547B72725678B9AC8F3" ma:contentTypeVersion="16" ma:contentTypeDescription="Create a new document." ma:contentTypeScope="" ma:versionID="271747c30a1d0c6f35a5932e18e305f5">
   <xsd:schema xmlns:xsd="http://www.w3.org/2001/XMLSchema" xmlns:xs="http://www.w3.org/2001/XMLSchema" xmlns:p="http://schemas.microsoft.com/office/2006/metadata/properties" xmlns:ns2="21eabdcc-72ab-4064-9f46-5100b1dc17a4" xmlns:ns3="0c8cfcba-b016-4e30-8556-6f1cb7c975af" targetNamespace="http://schemas.microsoft.com/office/2006/metadata/properties" ma:root="true" ma:fieldsID="0af4f099e4a2bd447a847ed71e35eb91" ns2:_="" ns3:_="">
     <xsd:import namespace="21eabdcc-72ab-4064-9f46-5100b1dc17a4"/>
@@ -29206,10 +30694,49 @@
 </ct:contentTypeSchema>
 </file>
 
+<file path=customXml/item2.xml><?xml version="1.0" encoding="utf-8"?>
+<p:properties xmlns:p="http://schemas.microsoft.com/office/2006/metadata/properties" xmlns:xsi="http://www.w3.org/2001/XMLSchema-instance" xmlns:pc="http://schemas.microsoft.com/office/infopath/2007/PartnerControls">
+  <documentManagement>
+    <SharedWithUsers xmlns="0c8cfcba-b016-4e30-8556-6f1cb7c975af">
+      <UserInfo>
+        <DisplayName>Choudhary, Babita</DisplayName>
+        <AccountId>49</AccountId>
+        <AccountType/>
+      </UserInfo>
+    </SharedWithUsers>
+    <TaxCatchAll xmlns="0c8cfcba-b016-4e30-8556-6f1cb7c975af" xsi:nil="true"/>
+    <lcf76f155ced4ddcb4097134ff3c332f xmlns="21eabdcc-72ab-4064-9f46-5100b1dc17a4">
+      <Terms xmlns="http://schemas.microsoft.com/office/infopath/2007/PartnerControls"/>
+    </lcf76f155ced4ddcb4097134ff3c332f>
+  </documentManagement>
+</p:properties>
+</file>
+
+<file path=customXml/item3.xml><?xml version="1.0" encoding="utf-8"?>
+<?mso-contentType ?>
+<FormTemplates xmlns="http://schemas.microsoft.com/sharepoint/v3/contenttype/forms">
+  <Display>DocumentLibraryForm</Display>
+  <Edit>DocumentLibraryForm</Edit>
+  <New>DocumentLibraryForm</New>
+</FormTemplates>
+</file>
+
 <file path=customXml/itemProps1.xml><?xml version="1.0" encoding="utf-8"?>
-<ds:datastoreItem xmlns:ds="http://schemas.openxmlformats.org/officeDocument/2006/customXml" ds:itemID="{380FE039-71A2-40B4-A75C-21F3CDB51F48}">
+<ds:datastoreItem xmlns:ds="http://schemas.openxmlformats.org/officeDocument/2006/customXml" ds:itemID="{9A4F9743-95BA-4C12-87A3-813E241F842B}">
   <ds:schemaRefs>
-    <ds:schemaRef ds:uri="http://schemas.microsoft.com/sharepoint/v3/contenttype/forms"/>
+    <ds:schemaRef ds:uri="0c8cfcba-b016-4e30-8556-6f1cb7c975af"/>
+    <ds:schemaRef ds:uri="21eabdcc-72ab-4064-9f46-5100b1dc17a4"/>
+    <ds:schemaRef ds:uri="http://purl.org/dc/elements/1.1/"/>
+    <ds:schemaRef ds:uri="http://purl.org/dc/terms/"/>
+    <ds:schemaRef ds:uri="http://schemas.microsoft.com/internal/obd"/>
+    <ds:schemaRef ds:uri="http://schemas.microsoft.com/office/2006/documentManagement/types"/>
+    <ds:schemaRef ds:uri="http://schemas.microsoft.com/office/2006/metadata/contentType"/>
+    <ds:schemaRef ds:uri="http://schemas.microsoft.com/office/2006/metadata/properties"/>
+    <ds:schemaRef ds:uri="http://schemas.microsoft.com/office/2006/metadata/properties/metaAttributes"/>
+    <ds:schemaRef ds:uri="http://schemas.microsoft.com/office/infopath/2007/PartnerControls"/>
+    <ds:schemaRef ds:uri="http://schemas.openxmlformats.org/package/2006/metadata/core-properties"/>
+    <ds:schemaRef ds:uri="http://www.w3.org/2000/xmlns/"/>
+    <ds:schemaRef ds:uri="http://www.w3.org/2001/XMLSchema"/>
   </ds:schemaRefs>
 </ds:datastoreItem>
 </file>
@@ -29232,21 +30759,9 @@
 </file>
 
 <file path=customXml/itemProps3.xml><?xml version="1.0" encoding="utf-8"?>
-<ds:datastoreItem xmlns:ds="http://schemas.openxmlformats.org/officeDocument/2006/customXml" ds:itemID="{9A4F9743-95BA-4C12-87A3-813E241F842B}">
+<ds:datastoreItem xmlns:ds="http://schemas.openxmlformats.org/officeDocument/2006/customXml" ds:itemID="{380FE039-71A2-40B4-A75C-21F3CDB51F48}">
   <ds:schemaRefs>
-    <ds:schemaRef ds:uri="0c8cfcba-b016-4e30-8556-6f1cb7c975af"/>
-    <ds:schemaRef ds:uri="21eabdcc-72ab-4064-9f46-5100b1dc17a4"/>
-    <ds:schemaRef ds:uri="http://purl.org/dc/elements/1.1/"/>
-    <ds:schemaRef ds:uri="http://purl.org/dc/terms/"/>
-    <ds:schemaRef ds:uri="http://schemas.microsoft.com/internal/obd"/>
-    <ds:schemaRef ds:uri="http://schemas.microsoft.com/office/2006/documentManagement/types"/>
-    <ds:schemaRef ds:uri="http://schemas.microsoft.com/office/2006/metadata/contentType"/>
-    <ds:schemaRef ds:uri="http://schemas.microsoft.com/office/2006/metadata/properties"/>
-    <ds:schemaRef ds:uri="http://schemas.microsoft.com/office/2006/metadata/properties/metaAttributes"/>
-    <ds:schemaRef ds:uri="http://schemas.microsoft.com/office/infopath/2007/PartnerControls"/>
-    <ds:schemaRef ds:uri="http://schemas.openxmlformats.org/package/2006/metadata/core-properties"/>
-    <ds:schemaRef ds:uri="http://www.w3.org/2000/xmlns/"/>
-    <ds:schemaRef ds:uri="http://www.w3.org/2001/XMLSchema"/>
+    <ds:schemaRef ds:uri="http://schemas.microsoft.com/sharepoint/v3/contenttype/forms"/>
   </ds:schemaRefs>
 </ds:datastoreItem>
 </file>

--- a/WeeklyDeck_Template.pptx
+++ b/WeeklyDeck_Template.pptx
@@ -1115,6 +1115,15 @@
     </pc:docChg>
   </pc:docChgLst>
   <pc:docChgLst>
+    <pc:chgData name="Kumar, M Pavan" userId="S::mpavkumar@deloitte.com::c57e25e4-4624-4003-81ff-e96fcf3c5b4e" providerId="AD" clId="Web-{23B060F6-0568-EC90-8D71-974C698F1742}"/>
+    <pc:docChg chg="modSld">
+      <pc:chgData name="Kumar, M Pavan" userId="S::mpavkumar@deloitte.com::c57e25e4-4624-4003-81ff-e96fcf3c5b4e" providerId="AD" clId="Web-{23B060F6-0568-EC90-8D71-974C698F1742}" dt="2025-08-29T10:53:10.133" v="19"/>
+      <pc:docMkLst>
+        <pc:docMk/>
+      </pc:docMkLst>
+    </pc:docChg>
+  </pc:docChgLst>
+  <pc:docChgLst>
     <pc:chgData name="Rawat, Pragati" userId="9b4df913-7eb4-456c-8eee-342fbb4de8cb" providerId="ADAL" clId="{BC1DC6D2-5522-4C94-BF43-15ED7545B0BD}"/>
     <pc:docChg chg="custSel modSld">
       <pc:chgData name="Rawat, Pragati" userId="9b4df913-7eb4-456c-8eee-342fbb4de8cb" providerId="ADAL" clId="{BC1DC6D2-5522-4C94-BF43-15ED7545B0BD}" dt="2025-09-12T14:56:09.873" v="100" actId="20577"/>
@@ -1136,15 +1145,6 @@
           </ac:graphicFrameMkLst>
         </pc:graphicFrameChg>
       </pc:sldChg>
-    </pc:docChg>
-  </pc:docChgLst>
-  <pc:docChgLst>
-    <pc:chgData name="Kumar, M Pavan" userId="S::mpavkumar@deloitte.com::c57e25e4-4624-4003-81ff-e96fcf3c5b4e" providerId="AD" clId="Web-{23B060F6-0568-EC90-8D71-974C698F1742}"/>
-    <pc:docChg chg="modSld">
-      <pc:chgData name="Kumar, M Pavan" userId="S::mpavkumar@deloitte.com::c57e25e4-4624-4003-81ff-e96fcf3c5b4e" providerId="AD" clId="Web-{23B060F6-0568-EC90-8D71-974C698F1742}" dt="2025-08-29T10:53:10.133" v="19"/>
-      <pc:docMkLst>
-        <pc:docMk/>
-      </pc:docMkLst>
     </pc:docChg>
   </pc:docChgLst>
   <pc:docChgLst>
@@ -8141,7 +8141,7 @@
           <a:p>
             <a:fld id="{BDA21943-350D-4AAA-BB44-C822C3A37900}" type="datetimeFigureOut">
               <a:rPr lang="en-US" smtClean="0"/>
-              <a:t>7/9/2026</a:t>
+              <a:t>8/14/2026</a:t>
             </a:fld>
             <a:endParaRPr lang="en-US"/>
           </a:p>
@@ -14517,14 +14517,14 @@
           <p:nvPr>
             <p:extLst>
               <p:ext uri="{D42A27DB-BD31-4B8C-83A1-F6EECF244321}">
-                <p14:modId xmlns:p14="http://schemas.microsoft.com/office/powerpoint/2010/main" val="3733619037"/>
+                <p14:modId xmlns:p14="http://schemas.microsoft.com/office/powerpoint/2010/main" val="3256397751"/>
               </p:ext>
             </p:extLst>
           </p:nvPr>
         </p:nvGraphicFramePr>
         <p:xfrm>
           <a:off x="0" y="445691"/>
-          <a:ext cx="12191998" cy="6412309"/>
+          <a:ext cx="12191998" cy="5487023"/>
         </p:xfrm>
         <a:graphic>
           <a:graphicData uri="http://schemas.openxmlformats.org/drawingml/2006/table">
@@ -14562,7 +14562,7 @@
                   </a:extLst>
                 </a:gridCol>
               </a:tblGrid>
-              <a:tr h="427574">
+              <a:tr h="482360">
                 <a:tc>
                   <a:txBody>
                     <a:bodyPr/>
@@ -14881,359 +14881,7 @@
                   </a:ext>
                 </a:extLst>
               </a:tr>
-              <a:tr h="1548494">
-                <a:tc>
-                  <a:txBody>
-                    <a:bodyPr/>
-                    <a:lstStyle/>
-                    <a:p>
-                      <a:pPr marL="0" lvl="0" indent="0" algn="ctr">
-                        <a:lnSpc>
-                          <a:spcPct val="100000"/>
-                        </a:lnSpc>
-                        <a:spcBef>
-                          <a:spcPts val="0"/>
-                        </a:spcBef>
-                        <a:spcAft>
-                          <a:spcPts val="0"/>
-                        </a:spcAft>
-                        <a:buNone/>
-                      </a:pPr>
-                      <a:r>
-                        <a:rPr lang="en-US" sz="1100" b="1" i="0" u="none" strike="noStrike" kern="1200">
-                          <a:solidFill>
-                            <a:srgbClr val="000000"/>
-                          </a:solidFill>
-                          <a:effectLst/>
-                          <a:latin typeface="Open Sans"/>
-                          <a:ea typeface="Open Sans"/>
-                          <a:cs typeface="Open Sans"/>
-                        </a:rPr>
-                        <a:t>EC Link</a:t>
-                      </a:r>
-                      <a:endParaRPr lang="en-US" sz="1100"/>
-                    </a:p>
-                  </a:txBody>
-                  <a:tcPr marT="18288" marB="18288" anchor="ctr">
-                    <a:lnL w="12700" cap="flat" cmpd="sng" algn="ctr">
-                      <a:solidFill>
-                        <a:schemeClr val="tx1">
-                          <a:lumMod val="65000"/>
-                        </a:schemeClr>
-                      </a:solidFill>
-                      <a:prstDash val="solid"/>
-                      <a:round/>
-                      <a:headEnd type="none" w="med" len="med"/>
-                      <a:tailEnd type="none" w="med" len="med"/>
-                    </a:lnL>
-                    <a:lnR w="12700" cap="flat" cmpd="sng" algn="ctr">
-                      <a:solidFill>
-                        <a:schemeClr val="tx1">
-                          <a:lumMod val="65000"/>
-                        </a:schemeClr>
-                      </a:solidFill>
-                      <a:prstDash val="solid"/>
-                      <a:round/>
-                      <a:headEnd type="none" w="med" len="med"/>
-                      <a:tailEnd type="none" w="med" len="med"/>
-                    </a:lnR>
-                    <a:lnT w="12700" cap="flat" cmpd="sng" algn="ctr">
-                      <a:solidFill>
-                        <a:schemeClr val="tx1">
-                          <a:lumMod val="65000"/>
-                        </a:schemeClr>
-                      </a:solidFill>
-                      <a:prstDash val="solid"/>
-                      <a:round/>
-                      <a:headEnd type="none" w="med" len="med"/>
-                      <a:tailEnd type="none" w="med" len="med"/>
-                    </a:lnT>
-                    <a:lnB w="12700" cap="flat" cmpd="sng" algn="ctr">
-                      <a:solidFill>
-                        <a:schemeClr val="tx1">
-                          <a:lumMod val="65000"/>
-                        </a:schemeClr>
-                      </a:solidFill>
-                      <a:prstDash val="solid"/>
-                      <a:round/>
-                      <a:headEnd type="none" w="med" len="med"/>
-                      <a:tailEnd type="none" w="med" len="med"/>
-                    </a:lnB>
-                    <a:noFill/>
-                  </a:tcPr>
-                </a:tc>
-                <a:tc>
-                  <a:txBody>
-                    <a:bodyPr/>
-                    <a:lstStyle/>
-                    <a:p>
-                      <a:pPr marL="0" lvl="0" indent="0" algn="ctr" defTabSz="914400">
-                        <a:lnSpc>
-                          <a:spcPct val="100000"/>
-                        </a:lnSpc>
-                        <a:spcBef>
-                          <a:spcPts val="400"/>
-                        </a:spcBef>
-                        <a:spcAft>
-                          <a:spcPts val="0"/>
-                        </a:spcAft>
-                        <a:buNone/>
-                        <a:tabLst/>
-                        <a:defRPr/>
-                      </a:pPr>
-                      <a:r>
-                        <a:rPr lang="en-US" sz="2800" b="1" i="0" u="none" strike="noStrike" kern="1200" cap="none" spc="0" normalizeH="0" baseline="0" noProof="0">
-                          <a:ln>
-                            <a:noFill/>
-                          </a:ln>
-                          <a:solidFill>
-                            <a:srgbClr val="00B050"/>
-                          </a:solidFill>
-                          <a:effectLst/>
-                          <a:uLnTx/>
-                          <a:uFillTx/>
-                          <a:latin typeface="Open Sans"/>
-                        </a:rPr>
-                        <a:t>●</a:t>
-                      </a:r>
-                      <a:endParaRPr kumimoji="0" lang="en-US" sz="2800"/>
-                    </a:p>
-                  </a:txBody>
-                  <a:tcPr marT="18288" marB="18288" anchor="ctr">
-                    <a:lnL w="12700" cap="flat" cmpd="sng" algn="ctr">
-                      <a:solidFill>
-                        <a:schemeClr val="tx1">
-                          <a:lumMod val="65000"/>
-                        </a:schemeClr>
-                      </a:solidFill>
-                      <a:prstDash val="solid"/>
-                      <a:round/>
-                      <a:headEnd type="none" w="med" len="med"/>
-                      <a:tailEnd type="none" w="med" len="med"/>
-                    </a:lnL>
-                    <a:lnR w="12700" cap="flat" cmpd="sng" algn="ctr">
-                      <a:solidFill>
-                        <a:schemeClr val="tx1">
-                          <a:lumMod val="65000"/>
-                        </a:schemeClr>
-                      </a:solidFill>
-                      <a:prstDash val="solid"/>
-                      <a:round/>
-                      <a:headEnd type="none" w="med" len="med"/>
-                      <a:tailEnd type="none" w="med" len="med"/>
-                    </a:lnR>
-                    <a:lnT w="12700" cap="flat" cmpd="sng" algn="ctr">
-                      <a:solidFill>
-                        <a:schemeClr val="tx1">
-                          <a:lumMod val="65000"/>
-                        </a:schemeClr>
-                      </a:solidFill>
-                      <a:prstDash val="solid"/>
-                      <a:round/>
-                      <a:headEnd type="none" w="med" len="med"/>
-                      <a:tailEnd type="none" w="med" len="med"/>
-                    </a:lnT>
-                    <a:lnB w="12700" cap="flat" cmpd="sng" algn="ctr">
-                      <a:solidFill>
-                        <a:schemeClr val="tx1">
-                          <a:lumMod val="65000"/>
-                        </a:schemeClr>
-                      </a:solidFill>
-                      <a:prstDash val="solid"/>
-                      <a:round/>
-                      <a:headEnd type="none" w="med" len="med"/>
-                      <a:tailEnd type="none" w="med" len="med"/>
-                    </a:lnB>
-                    <a:lnTlToBr w="0">
-                      <a:noFill/>
-                    </a:lnTlToBr>
-                    <a:lnBlToTr w="0">
-                      <a:noFill/>
-                    </a:lnBlToTr>
-                    <a:noFill/>
-                  </a:tcPr>
-                </a:tc>
-                <a:tc>
-                  <a:txBody>
-                    <a:bodyPr/>
-                    <a:lstStyle/>
-                    <a:p>
-                      <a:pPr marL="285750" lvl="0" indent="-285750" algn="just">
-                        <a:lnSpc>
-                          <a:spcPct val="100000"/>
-                        </a:lnSpc>
-                        <a:spcBef>
-                          <a:spcPts val="0"/>
-                        </a:spcBef>
-                        <a:spcAft>
-                          <a:spcPts val="0"/>
-                        </a:spcAft>
-                        <a:buClr>
-                          <a:srgbClr val="FFFFFF"/>
-                        </a:buClr>
-                        <a:buFont typeface="Arial"/>
-                        <a:buChar char="•"/>
-                      </a:pPr>
-                      <a:endParaRPr lang="en-US" sz="1000" dirty="0">
-                        <a:latin typeface="Open Sans"/>
-                      </a:endParaRPr>
-                    </a:p>
-                  </a:txBody>
-                  <a:tcPr marT="18288" marB="18288" anchor="ctr">
-                    <a:lnL w="12700" cap="flat" cmpd="sng" algn="ctr">
-                      <a:solidFill>
-                        <a:schemeClr val="tx1">
-                          <a:lumMod val="65000"/>
-                        </a:schemeClr>
-                      </a:solidFill>
-                      <a:prstDash val="solid"/>
-                      <a:round/>
-                      <a:headEnd type="none" w="med" len="med"/>
-                      <a:tailEnd type="none" w="med" len="med"/>
-                    </a:lnL>
-                    <a:lnR w="12700" cap="flat" cmpd="sng" algn="ctr">
-                      <a:solidFill>
-                        <a:schemeClr val="tx1">
-                          <a:lumMod val="65000"/>
-                        </a:schemeClr>
-                      </a:solidFill>
-                      <a:prstDash val="solid"/>
-                      <a:round/>
-                      <a:headEnd type="none" w="med" len="med"/>
-                      <a:tailEnd type="none" w="med" len="med"/>
-                    </a:lnR>
-                    <a:lnT w="12700" cap="flat" cmpd="sng" algn="ctr">
-                      <a:solidFill>
-                        <a:schemeClr val="tx1">
-                          <a:lumMod val="65000"/>
-                        </a:schemeClr>
-                      </a:solidFill>
-                      <a:prstDash val="solid"/>
-                      <a:round/>
-                      <a:headEnd type="none" w="med" len="med"/>
-                      <a:tailEnd type="none" w="med" len="med"/>
-                    </a:lnT>
-                    <a:lnB w="12700" cap="flat" cmpd="sng" algn="ctr">
-                      <a:solidFill>
-                        <a:schemeClr val="tx1">
-                          <a:lumMod val="65000"/>
-                        </a:schemeClr>
-                      </a:solidFill>
-                      <a:prstDash val="solid"/>
-                      <a:round/>
-                      <a:headEnd type="none" w="med" len="med"/>
-                      <a:tailEnd type="none" w="med" len="med"/>
-                    </a:lnB>
-                    <a:lnTlToBr w="0">
-                      <a:noFill/>
-                    </a:lnTlToBr>
-                    <a:lnBlToTr w="0">
-                      <a:noFill/>
-                    </a:lnBlToTr>
-                    <a:noFill/>
-                  </a:tcPr>
-                </a:tc>
-                <a:tc>
-                  <a:txBody>
-                    <a:bodyPr/>
-                    <a:lstStyle/>
-                    <a:p>
-                      <a:pPr marL="0" marR="0" lvl="0" indent="0" algn="just">
-                        <a:lnSpc>
-                          <a:spcPct val="100000"/>
-                        </a:lnSpc>
-                        <a:spcBef>
-                          <a:spcPts val="0"/>
-                        </a:spcBef>
-                        <a:spcAft>
-                          <a:spcPts val="0"/>
-                        </a:spcAft>
-                        <a:buNone/>
-                      </a:pPr>
-                      <a:r>
-                        <a:rPr lang="en-US" sz="1000" b="1" i="0" u="none" strike="noStrike" kern="1200" noProof="0" dirty="0">
-                          <a:solidFill>
-                            <a:schemeClr val="bg1"/>
-                          </a:solidFill>
-                          <a:effectLst/>
-                          <a:latin typeface="Open Sans"/>
-                          <a:ea typeface="Open Sans"/>
-                          <a:cs typeface="Open Sans"/>
-                        </a:rPr>
-                        <a:t>Ticket Status:</a:t>
-                      </a:r>
-                      <a:endParaRPr lang="en-US" sz="1000" b="1" i="0" u="none" strike="noStrike" kern="1200" dirty="0">
-                        <a:solidFill>
-                          <a:schemeClr val="bg1"/>
-                        </a:solidFill>
-                        <a:effectLst/>
-                        <a:latin typeface="Open Sans"/>
-                        <a:ea typeface="Open Sans"/>
-                        <a:cs typeface="Open Sans"/>
-                      </a:endParaRPr>
-                    </a:p>
-                  </a:txBody>
-                  <a:tcPr marT="18288" marB="18288" anchor="ctr">
-                    <a:lnL w="12700" cap="flat" cmpd="sng" algn="ctr">
-                      <a:solidFill>
-                        <a:schemeClr val="tx1">
-                          <a:lumMod val="65000"/>
-                        </a:schemeClr>
-                      </a:solidFill>
-                      <a:prstDash val="solid"/>
-                      <a:round/>
-                      <a:headEnd type="none" w="med" len="med"/>
-                      <a:tailEnd type="none" w="med" len="med"/>
-                    </a:lnL>
-                    <a:lnR w="12700" cap="flat" cmpd="sng" algn="ctr">
-                      <a:solidFill>
-                        <a:schemeClr val="tx1">
-                          <a:lumMod val="65000"/>
-                        </a:schemeClr>
-                      </a:solidFill>
-                      <a:prstDash val="solid"/>
-                      <a:round/>
-                      <a:headEnd type="none" w="med" len="med"/>
-                      <a:tailEnd type="none" w="med" len="med"/>
-                    </a:lnR>
-                    <a:lnT w="12700" cap="flat" cmpd="sng" algn="ctr">
-                      <a:solidFill>
-                        <a:schemeClr val="tx1">
-                          <a:lumMod val="65000"/>
-                        </a:schemeClr>
-                      </a:solidFill>
-                      <a:prstDash val="solid"/>
-                      <a:round/>
-                      <a:headEnd type="none" w="med" len="med"/>
-                      <a:tailEnd type="none" w="med" len="med"/>
-                    </a:lnT>
-                    <a:lnB w="12700" cap="flat" cmpd="sng" algn="ctr">
-                      <a:solidFill>
-                        <a:schemeClr val="tx1">
-                          <a:lumMod val="65000"/>
-                        </a:schemeClr>
-                      </a:solidFill>
-                      <a:prstDash val="solid"/>
-                      <a:round/>
-                      <a:headEnd type="none" w="med" len="med"/>
-                      <a:tailEnd type="none" w="med" len="med"/>
-                    </a:lnB>
-                    <a:lnTlToBr w="0">
-                      <a:noFill/>
-                    </a:lnTlToBr>
-                    <a:lnBlToTr w="0">
-                      <a:noFill/>
-                    </a:lnBlToTr>
-                    <a:noFill/>
-                  </a:tcPr>
-                </a:tc>
-                <a:extLst>
-                  <a:ext uri="{0D108BD9-81ED-4DB2-BD59-A6C34878D82A}">
-                    <a16:rowId xmlns:a16="http://schemas.microsoft.com/office/drawing/2014/main" val="4117195127"/>
-                  </a:ext>
-                </a:extLst>
-              </a:tr>
-              <a:tr h="4436241">
+              <a:tr h="5004663">
                 <a:tc>
                   <a:txBody>
                     <a:bodyPr/>
@@ -30452,6 +30100,33 @@
 </file>
 
 <file path=customXml/item1.xml><?xml version="1.0" encoding="utf-8"?>
+<?mso-contentType ?>
+<FormTemplates xmlns="http://schemas.microsoft.com/sharepoint/v3/contenttype/forms">
+  <Display>DocumentLibraryForm</Display>
+  <Edit>DocumentLibraryForm</Edit>
+  <New>DocumentLibraryForm</New>
+</FormTemplates>
+</file>
+
+<file path=customXml/item2.xml><?xml version="1.0" encoding="utf-8"?>
+<p:properties xmlns:p="http://schemas.microsoft.com/office/2006/metadata/properties" xmlns:xsi="http://www.w3.org/2001/XMLSchema-instance" xmlns:pc="http://schemas.microsoft.com/office/infopath/2007/PartnerControls">
+  <documentManagement>
+    <SharedWithUsers xmlns="0c8cfcba-b016-4e30-8556-6f1cb7c975af">
+      <UserInfo>
+        <DisplayName>Choudhary, Babita</DisplayName>
+        <AccountId>49</AccountId>
+        <AccountType/>
+      </UserInfo>
+    </SharedWithUsers>
+    <TaxCatchAll xmlns="0c8cfcba-b016-4e30-8556-6f1cb7c975af" xsi:nil="true"/>
+    <lcf76f155ced4ddcb4097134ff3c332f xmlns="21eabdcc-72ab-4064-9f46-5100b1dc17a4">
+      <Terms xmlns="http://schemas.microsoft.com/office/infopath/2007/PartnerControls"/>
+    </lcf76f155ced4ddcb4097134ff3c332f>
+  </documentManagement>
+</p:properties>
+</file>
+
+<file path=customXml/item3.xml><?xml version="1.0" encoding="utf-8"?>
 <ct:contentTypeSchema xmlns:ct="http://schemas.microsoft.com/office/2006/metadata/contentType" xmlns:ma="http://schemas.microsoft.com/office/2006/metadata/properties/metaAttributes" ct:_="" ma:_="" ma:contentTypeName="Document" ma:contentTypeID="0x010100BE5E5BA06A902547B72725678B9AC8F3" ma:contentTypeVersion="16" ma:contentTypeDescription="Create a new document." ma:contentTypeScope="" ma:versionID="271747c30a1d0c6f35a5932e18e305f5">
   <xsd:schema xmlns:xsd="http://www.w3.org/2001/XMLSchema" xmlns:xs="http://www.w3.org/2001/XMLSchema" xmlns:p="http://schemas.microsoft.com/office/2006/metadata/properties" xmlns:ns2="21eabdcc-72ab-4064-9f46-5100b1dc17a4" xmlns:ns3="0c8cfcba-b016-4e30-8556-6f1cb7c975af" targetNamespace="http://schemas.microsoft.com/office/2006/metadata/properties" ma:root="true" ma:fieldsID="0af4f099e4a2bd447a847ed71e35eb91" ns2:_="" ns3:_="">
     <xsd:import namespace="21eabdcc-72ab-4064-9f46-5100b1dc17a4"/>
@@ -30694,49 +30369,10 @@
 </ct:contentTypeSchema>
 </file>
 
-<file path=customXml/item2.xml><?xml version="1.0" encoding="utf-8"?>
-<p:properties xmlns:p="http://schemas.microsoft.com/office/2006/metadata/properties" xmlns:xsi="http://www.w3.org/2001/XMLSchema-instance" xmlns:pc="http://schemas.microsoft.com/office/infopath/2007/PartnerControls">
-  <documentManagement>
-    <SharedWithUsers xmlns="0c8cfcba-b016-4e30-8556-6f1cb7c975af">
-      <UserInfo>
-        <DisplayName>Choudhary, Babita</DisplayName>
-        <AccountId>49</AccountId>
-        <AccountType/>
-      </UserInfo>
-    </SharedWithUsers>
-    <TaxCatchAll xmlns="0c8cfcba-b016-4e30-8556-6f1cb7c975af" xsi:nil="true"/>
-    <lcf76f155ced4ddcb4097134ff3c332f xmlns="21eabdcc-72ab-4064-9f46-5100b1dc17a4">
-      <Terms xmlns="http://schemas.microsoft.com/office/infopath/2007/PartnerControls"/>
-    </lcf76f155ced4ddcb4097134ff3c332f>
-  </documentManagement>
-</p:properties>
-</file>
-
-<file path=customXml/item3.xml><?xml version="1.0" encoding="utf-8"?>
-<?mso-contentType ?>
-<FormTemplates xmlns="http://schemas.microsoft.com/sharepoint/v3/contenttype/forms">
-  <Display>DocumentLibraryForm</Display>
-  <Edit>DocumentLibraryForm</Edit>
-  <New>DocumentLibraryForm</New>
-</FormTemplates>
-</file>
-
 <file path=customXml/itemProps1.xml><?xml version="1.0" encoding="utf-8"?>
-<ds:datastoreItem xmlns:ds="http://schemas.openxmlformats.org/officeDocument/2006/customXml" ds:itemID="{9A4F9743-95BA-4C12-87A3-813E241F842B}">
+<ds:datastoreItem xmlns:ds="http://schemas.openxmlformats.org/officeDocument/2006/customXml" ds:itemID="{380FE039-71A2-40B4-A75C-21F3CDB51F48}">
   <ds:schemaRefs>
-    <ds:schemaRef ds:uri="0c8cfcba-b016-4e30-8556-6f1cb7c975af"/>
-    <ds:schemaRef ds:uri="21eabdcc-72ab-4064-9f46-5100b1dc17a4"/>
-    <ds:schemaRef ds:uri="http://purl.org/dc/elements/1.1/"/>
-    <ds:schemaRef ds:uri="http://purl.org/dc/terms/"/>
-    <ds:schemaRef ds:uri="http://schemas.microsoft.com/internal/obd"/>
-    <ds:schemaRef ds:uri="http://schemas.microsoft.com/office/2006/documentManagement/types"/>
-    <ds:schemaRef ds:uri="http://schemas.microsoft.com/office/2006/metadata/contentType"/>
-    <ds:schemaRef ds:uri="http://schemas.microsoft.com/office/2006/metadata/properties"/>
-    <ds:schemaRef ds:uri="http://schemas.microsoft.com/office/2006/metadata/properties/metaAttributes"/>
-    <ds:schemaRef ds:uri="http://schemas.microsoft.com/office/infopath/2007/PartnerControls"/>
-    <ds:schemaRef ds:uri="http://schemas.openxmlformats.org/package/2006/metadata/core-properties"/>
-    <ds:schemaRef ds:uri="http://www.w3.org/2000/xmlns/"/>
-    <ds:schemaRef ds:uri="http://www.w3.org/2001/XMLSchema"/>
+    <ds:schemaRef ds:uri="http://schemas.microsoft.com/sharepoint/v3/contenttype/forms"/>
   </ds:schemaRefs>
 </ds:datastoreItem>
 </file>
@@ -30759,9 +30395,21 @@
 </file>
 
 <file path=customXml/itemProps3.xml><?xml version="1.0" encoding="utf-8"?>
-<ds:datastoreItem xmlns:ds="http://schemas.openxmlformats.org/officeDocument/2006/customXml" ds:itemID="{380FE039-71A2-40B4-A75C-21F3CDB51F48}">
+<ds:datastoreItem xmlns:ds="http://schemas.openxmlformats.org/officeDocument/2006/customXml" ds:itemID="{9A4F9743-95BA-4C12-87A3-813E241F842B}">
   <ds:schemaRefs>
-    <ds:schemaRef ds:uri="http://schemas.microsoft.com/sharepoint/v3/contenttype/forms"/>
+    <ds:schemaRef ds:uri="0c8cfcba-b016-4e30-8556-6f1cb7c975af"/>
+    <ds:schemaRef ds:uri="21eabdcc-72ab-4064-9f46-5100b1dc17a4"/>
+    <ds:schemaRef ds:uri="http://purl.org/dc/elements/1.1/"/>
+    <ds:schemaRef ds:uri="http://purl.org/dc/terms/"/>
+    <ds:schemaRef ds:uri="http://schemas.microsoft.com/internal/obd"/>
+    <ds:schemaRef ds:uri="http://schemas.microsoft.com/office/2006/documentManagement/types"/>
+    <ds:schemaRef ds:uri="http://schemas.microsoft.com/office/2006/metadata/contentType"/>
+    <ds:schemaRef ds:uri="http://schemas.microsoft.com/office/2006/metadata/properties"/>
+    <ds:schemaRef ds:uri="http://schemas.microsoft.com/office/2006/metadata/properties/metaAttributes"/>
+    <ds:schemaRef ds:uri="http://schemas.microsoft.com/office/infopath/2007/PartnerControls"/>
+    <ds:schemaRef ds:uri="http://schemas.openxmlformats.org/package/2006/metadata/core-properties"/>
+    <ds:schemaRef ds:uri="http://www.w3.org/2000/xmlns/"/>
+    <ds:schemaRef ds:uri="http://www.w3.org/2001/XMLSchema"/>
   </ds:schemaRefs>
 </ds:datastoreItem>
 </file>
